--- a/public/fun/pack/pptx/review/보장점검양식_03_가족점검_교정벚나무.pptx
+++ b/public/fun/pack/pptx/review/보장점검양식_03_가족점검_교정벚나무.pptx
@@ -3347,7 +3347,7 @@
             <a:r>
               <a:rPr sz="3600" b="1" i="0">
                 <a:solidFill>
-                  <a:srgbClr val="9E2E4A"/>
+                  <a:srgbClr val="721D32"/>
                 </a:solidFill>
               </a:rPr>
               <a:t>우리 보험 점검 시간</a:t>
@@ -3385,7 +3385,7 @@
             <a:r>
               <a:rPr sz="1700" b="0" i="1">
                 <a:solidFill>
-                  <a:srgbClr val="9E2E4A"/>
+                  <a:srgbClr val="721D32"/>
                 </a:solidFill>
               </a:rPr>
               <a:t>가족 모두의 가입 내역을 한 장에 모읍니다</a:t>
@@ -3460,7 +3460,7 @@
     <p:bg>
       <p:bgPr>
         <a:solidFill>
-          <a:srgbClr val="D1617D"/>
+          <a:srgbClr val="DB3D65"/>
         </a:solidFill>
         <a:effectLst/>
       </p:bgPr>
@@ -3533,7 +3533,7 @@
             <a:r>
               <a:rPr sz="3000" b="1" i="0">
                 <a:solidFill>
-                  <a:srgbClr val="9E2E4A"/>
+                  <a:srgbClr val="721D32"/>
                 </a:solidFill>
               </a:rPr>
               <a:t>점검 대상 현황</a:t>
@@ -3585,30 +3585,30 @@
                   <a:tcPr anchor="ctr" marL="73152" marR="73152">
                     <a:lnL w="9525" cap="flat" cmpd="sng" algn="ctr">
                       <a:solidFill>
-                        <a:srgbClr val="D1617D"/>
+                        <a:srgbClr val="DB3D65"/>
                       </a:solidFill>
                       <a:prstDash val="solid"/>
                     </a:lnL>
                     <a:lnR w="9525" cap="flat" cmpd="sng" algn="ctr">
                       <a:solidFill>
-                        <a:srgbClr val="D1617D"/>
+                        <a:srgbClr val="DB3D65"/>
                       </a:solidFill>
                       <a:prstDash val="solid"/>
                     </a:lnR>
                     <a:lnT w="9525" cap="flat" cmpd="sng" algn="ctr">
                       <a:solidFill>
-                        <a:srgbClr val="D1617D"/>
+                        <a:srgbClr val="DB3D65"/>
                       </a:solidFill>
                       <a:prstDash val="solid"/>
                     </a:lnT>
                     <a:lnB w="9525" cap="flat" cmpd="sng" algn="ctr">
                       <a:solidFill>
-                        <a:srgbClr val="D1617D"/>
+                        <a:srgbClr val="DB3D65"/>
                       </a:solidFill>
                       <a:prstDash val="solid"/>
                     </a:lnB>
                     <a:solidFill>
-                      <a:srgbClr val="D1617D"/>
+                      <a:srgbClr val="DB3D65"/>
                     </a:solidFill>
                   </a:tcPr>
                 </a:tc>
@@ -3631,30 +3631,30 @@
                   <a:tcPr anchor="ctr" marL="73152" marR="73152">
                     <a:lnL w="9525" cap="flat" cmpd="sng" algn="ctr">
                       <a:solidFill>
-                        <a:srgbClr val="D1617D"/>
+                        <a:srgbClr val="DB3D65"/>
                       </a:solidFill>
                       <a:prstDash val="solid"/>
                     </a:lnL>
                     <a:lnR w="9525" cap="flat" cmpd="sng" algn="ctr">
                       <a:solidFill>
-                        <a:srgbClr val="D1617D"/>
+                        <a:srgbClr val="DB3D65"/>
                       </a:solidFill>
                       <a:prstDash val="solid"/>
                     </a:lnR>
                     <a:lnT w="9525" cap="flat" cmpd="sng" algn="ctr">
                       <a:solidFill>
-                        <a:srgbClr val="D1617D"/>
+                        <a:srgbClr val="DB3D65"/>
                       </a:solidFill>
                       <a:prstDash val="solid"/>
                     </a:lnT>
                     <a:lnB w="9525" cap="flat" cmpd="sng" algn="ctr">
                       <a:solidFill>
-                        <a:srgbClr val="D1617D"/>
+                        <a:srgbClr val="DB3D65"/>
                       </a:solidFill>
                       <a:prstDash val="solid"/>
                     </a:lnB>
                     <a:solidFill>
-                      <a:srgbClr val="D1617D"/>
+                      <a:srgbClr val="DB3D65"/>
                     </a:solidFill>
                   </a:tcPr>
                 </a:tc>
@@ -3677,30 +3677,30 @@
                   <a:tcPr anchor="ctr" marL="73152" marR="73152">
                     <a:lnL w="9525" cap="flat" cmpd="sng" algn="ctr">
                       <a:solidFill>
-                        <a:srgbClr val="D1617D"/>
+                        <a:srgbClr val="DB3D65"/>
                       </a:solidFill>
                       <a:prstDash val="solid"/>
                     </a:lnL>
                     <a:lnR w="9525" cap="flat" cmpd="sng" algn="ctr">
                       <a:solidFill>
-                        <a:srgbClr val="D1617D"/>
+                        <a:srgbClr val="DB3D65"/>
                       </a:solidFill>
                       <a:prstDash val="solid"/>
                     </a:lnR>
                     <a:lnT w="9525" cap="flat" cmpd="sng" algn="ctr">
                       <a:solidFill>
-                        <a:srgbClr val="D1617D"/>
+                        <a:srgbClr val="DB3D65"/>
                       </a:solidFill>
                       <a:prstDash val="solid"/>
                     </a:lnT>
                     <a:lnB w="9525" cap="flat" cmpd="sng" algn="ctr">
                       <a:solidFill>
-                        <a:srgbClr val="D1617D"/>
+                        <a:srgbClr val="DB3D65"/>
                       </a:solidFill>
                       <a:prstDash val="solid"/>
                     </a:lnB>
                     <a:solidFill>
-                      <a:srgbClr val="D1617D"/>
+                      <a:srgbClr val="DB3D65"/>
                     </a:solidFill>
                   </a:tcPr>
                 </a:tc>
@@ -3723,30 +3723,30 @@
                   <a:tcPr anchor="ctr" marL="73152" marR="73152">
                     <a:lnL w="9525" cap="flat" cmpd="sng" algn="ctr">
                       <a:solidFill>
-                        <a:srgbClr val="D1617D"/>
+                        <a:srgbClr val="DB3D65"/>
                       </a:solidFill>
                       <a:prstDash val="solid"/>
                     </a:lnL>
                     <a:lnR w="9525" cap="flat" cmpd="sng" algn="ctr">
                       <a:solidFill>
-                        <a:srgbClr val="D1617D"/>
+                        <a:srgbClr val="DB3D65"/>
                       </a:solidFill>
                       <a:prstDash val="solid"/>
                     </a:lnR>
                     <a:lnT w="9525" cap="flat" cmpd="sng" algn="ctr">
                       <a:solidFill>
-                        <a:srgbClr val="D1617D"/>
+                        <a:srgbClr val="DB3D65"/>
                       </a:solidFill>
                       <a:prstDash val="solid"/>
                     </a:lnT>
                     <a:lnB w="9525" cap="flat" cmpd="sng" algn="ctr">
                       <a:solidFill>
-                        <a:srgbClr val="D1617D"/>
+                        <a:srgbClr val="DB3D65"/>
                       </a:solidFill>
                       <a:prstDash val="solid"/>
                     </a:lnB>
                     <a:solidFill>
-                      <a:srgbClr val="D1617D"/>
+                      <a:srgbClr val="DB3D65"/>
                     </a:solidFill>
                   </a:tcPr>
                 </a:tc>
@@ -3761,7 +3761,7 @@
                       <a:r>
                         <a:rPr sz="1600" b="1">
                           <a:solidFill>
-                            <a:srgbClr val="9E2E4A"/>
+                            <a:srgbClr val="721D32"/>
                           </a:solidFill>
                         </a:rPr>
                         <a:t>이름</a:t>
@@ -3771,30 +3771,30 @@
                   <a:tcPr anchor="ctr" marL="73152" marR="73152">
                     <a:lnL w="9525" cap="flat" cmpd="sng" algn="ctr">
                       <a:solidFill>
-                        <a:srgbClr val="F3CED7"/>
+                        <a:srgbClr val="F7D4DD"/>
                       </a:solidFill>
                       <a:prstDash val="solid"/>
                     </a:lnL>
                     <a:lnR w="9525" cap="flat" cmpd="sng" algn="ctr">
                       <a:solidFill>
-                        <a:srgbClr val="F3CED7"/>
+                        <a:srgbClr val="F7D4DD"/>
                       </a:solidFill>
                       <a:prstDash val="solid"/>
                     </a:lnR>
                     <a:lnT w="9525" cap="flat" cmpd="sng" algn="ctr">
                       <a:solidFill>
-                        <a:srgbClr val="F3CED7"/>
+                        <a:srgbClr val="F7D4DD"/>
                       </a:solidFill>
                       <a:prstDash val="solid"/>
                     </a:lnT>
                     <a:lnB w="9525" cap="flat" cmpd="sng" algn="ctr">
                       <a:solidFill>
-                        <a:srgbClr val="F3CED7"/>
+                        <a:srgbClr val="F7D4DD"/>
                       </a:solidFill>
                       <a:prstDash val="solid"/>
                     </a:lnB>
                     <a:solidFill>
-                      <a:srgbClr val="F3CED7"/>
+                      <a:srgbClr val="F7D4DD"/>
                     </a:solidFill>
                   </a:tcPr>
                 </a:tc>
@@ -3817,25 +3817,25 @@
                   <a:tcPr anchor="ctr" marL="73152" marR="73152">
                     <a:lnL w="9525" cap="flat" cmpd="sng" algn="ctr">
                       <a:solidFill>
-                        <a:srgbClr val="F3CED7"/>
+                        <a:srgbClr val="F7D4DD"/>
                       </a:solidFill>
                       <a:prstDash val="solid"/>
                     </a:lnL>
                     <a:lnR w="9525" cap="flat" cmpd="sng" algn="ctr">
                       <a:solidFill>
-                        <a:srgbClr val="F3CED7"/>
+                        <a:srgbClr val="F7D4DD"/>
                       </a:solidFill>
                       <a:prstDash val="solid"/>
                     </a:lnR>
                     <a:lnT w="9525" cap="flat" cmpd="sng" algn="ctr">
                       <a:solidFill>
-                        <a:srgbClr val="F3CED7"/>
+                        <a:srgbClr val="F7D4DD"/>
                       </a:solidFill>
                       <a:prstDash val="solid"/>
                     </a:lnT>
                     <a:lnB w="9525" cap="flat" cmpd="sng" algn="ctr">
                       <a:solidFill>
-                        <a:srgbClr val="F3CED7"/>
+                        <a:srgbClr val="F7D4DD"/>
                       </a:solidFill>
                       <a:prstDash val="solid"/>
                     </a:lnB>
@@ -3863,25 +3863,25 @@
                   <a:tcPr anchor="ctr" marL="73152" marR="73152">
                     <a:lnL w="9525" cap="flat" cmpd="sng" algn="ctr">
                       <a:solidFill>
-                        <a:srgbClr val="F3CED7"/>
+                        <a:srgbClr val="F7D4DD"/>
                       </a:solidFill>
                       <a:prstDash val="solid"/>
                     </a:lnL>
                     <a:lnR w="9525" cap="flat" cmpd="sng" algn="ctr">
                       <a:solidFill>
-                        <a:srgbClr val="F3CED7"/>
+                        <a:srgbClr val="F7D4DD"/>
                       </a:solidFill>
                       <a:prstDash val="solid"/>
                     </a:lnR>
                     <a:lnT w="9525" cap="flat" cmpd="sng" algn="ctr">
                       <a:solidFill>
-                        <a:srgbClr val="F3CED7"/>
+                        <a:srgbClr val="F7D4DD"/>
                       </a:solidFill>
                       <a:prstDash val="solid"/>
                     </a:lnT>
                     <a:lnB w="9525" cap="flat" cmpd="sng" algn="ctr">
                       <a:solidFill>
-                        <a:srgbClr val="F3CED7"/>
+                        <a:srgbClr val="F7D4DD"/>
                       </a:solidFill>
                       <a:prstDash val="solid"/>
                     </a:lnB>
@@ -3909,25 +3909,25 @@
                   <a:tcPr anchor="ctr" marL="73152" marR="73152">
                     <a:lnL w="9525" cap="flat" cmpd="sng" algn="ctr">
                       <a:solidFill>
-                        <a:srgbClr val="F3CED7"/>
+                        <a:srgbClr val="F7D4DD"/>
                       </a:solidFill>
                       <a:prstDash val="solid"/>
                     </a:lnL>
                     <a:lnR w="9525" cap="flat" cmpd="sng" algn="ctr">
                       <a:solidFill>
-                        <a:srgbClr val="F3CED7"/>
+                        <a:srgbClr val="F7D4DD"/>
                       </a:solidFill>
                       <a:prstDash val="solid"/>
                     </a:lnR>
                     <a:lnT w="9525" cap="flat" cmpd="sng" algn="ctr">
                       <a:solidFill>
-                        <a:srgbClr val="F3CED7"/>
+                        <a:srgbClr val="F7D4DD"/>
                       </a:solidFill>
                       <a:prstDash val="solid"/>
                     </a:lnT>
                     <a:lnB w="9525" cap="flat" cmpd="sng" algn="ctr">
                       <a:solidFill>
-                        <a:srgbClr val="F3CED7"/>
+                        <a:srgbClr val="F7D4DD"/>
                       </a:solidFill>
                       <a:prstDash val="solid"/>
                     </a:lnB>
@@ -3947,7 +3947,7 @@
                       <a:r>
                         <a:rPr sz="1600" b="1">
                           <a:solidFill>
-                            <a:srgbClr val="9E2E4A"/>
+                            <a:srgbClr val="721D32"/>
                           </a:solidFill>
                         </a:rPr>
                         <a:t>나이</a:t>
@@ -3957,30 +3957,30 @@
                   <a:tcPr anchor="ctr" marL="73152" marR="73152">
                     <a:lnL w="9525" cap="flat" cmpd="sng" algn="ctr">
                       <a:solidFill>
-                        <a:srgbClr val="F3CED7"/>
+                        <a:srgbClr val="F7D4DD"/>
                       </a:solidFill>
                       <a:prstDash val="solid"/>
                     </a:lnL>
                     <a:lnR w="9525" cap="flat" cmpd="sng" algn="ctr">
                       <a:solidFill>
-                        <a:srgbClr val="F3CED7"/>
+                        <a:srgbClr val="F7D4DD"/>
                       </a:solidFill>
                       <a:prstDash val="solid"/>
                     </a:lnR>
                     <a:lnT w="9525" cap="flat" cmpd="sng" algn="ctr">
                       <a:solidFill>
-                        <a:srgbClr val="F3CED7"/>
+                        <a:srgbClr val="F7D4DD"/>
                       </a:solidFill>
                       <a:prstDash val="solid"/>
                     </a:lnT>
                     <a:lnB w="9525" cap="flat" cmpd="sng" algn="ctr">
                       <a:solidFill>
-                        <a:srgbClr val="F3CED7"/>
+                        <a:srgbClr val="F7D4DD"/>
                       </a:solidFill>
                       <a:prstDash val="solid"/>
                     </a:lnB>
                     <a:solidFill>
-                      <a:srgbClr val="F3CED7"/>
+                      <a:srgbClr val="F7D4DD"/>
                     </a:solidFill>
                   </a:tcPr>
                 </a:tc>
@@ -4003,30 +4003,30 @@
                   <a:tcPr anchor="ctr" marL="73152" marR="73152">
                     <a:lnL w="9525" cap="flat" cmpd="sng" algn="ctr">
                       <a:solidFill>
-                        <a:srgbClr val="F3CED7"/>
+                        <a:srgbClr val="F7D4DD"/>
                       </a:solidFill>
                       <a:prstDash val="solid"/>
                     </a:lnL>
                     <a:lnR w="9525" cap="flat" cmpd="sng" algn="ctr">
                       <a:solidFill>
-                        <a:srgbClr val="F3CED7"/>
+                        <a:srgbClr val="F7D4DD"/>
                       </a:solidFill>
                       <a:prstDash val="solid"/>
                     </a:lnR>
                     <a:lnT w="9525" cap="flat" cmpd="sng" algn="ctr">
                       <a:solidFill>
-                        <a:srgbClr val="F3CED7"/>
+                        <a:srgbClr val="F7D4DD"/>
                       </a:solidFill>
                       <a:prstDash val="solid"/>
                     </a:lnT>
                     <a:lnB w="9525" cap="flat" cmpd="sng" algn="ctr">
                       <a:solidFill>
-                        <a:srgbClr val="F3CED7"/>
+                        <a:srgbClr val="F7D4DD"/>
                       </a:solidFill>
                       <a:prstDash val="solid"/>
                     </a:lnB>
                     <a:solidFill>
-                      <a:srgbClr val="FAEFF2"/>
+                      <a:srgbClr val="FCF3F5"/>
                     </a:solidFill>
                   </a:tcPr>
                 </a:tc>
@@ -4049,30 +4049,30 @@
                   <a:tcPr anchor="ctr" marL="73152" marR="73152">
                     <a:lnL w="9525" cap="flat" cmpd="sng" algn="ctr">
                       <a:solidFill>
-                        <a:srgbClr val="F3CED7"/>
+                        <a:srgbClr val="F7D4DD"/>
                       </a:solidFill>
                       <a:prstDash val="solid"/>
                     </a:lnL>
                     <a:lnR w="9525" cap="flat" cmpd="sng" algn="ctr">
                       <a:solidFill>
-                        <a:srgbClr val="F3CED7"/>
+                        <a:srgbClr val="F7D4DD"/>
                       </a:solidFill>
                       <a:prstDash val="solid"/>
                     </a:lnR>
                     <a:lnT w="9525" cap="flat" cmpd="sng" algn="ctr">
                       <a:solidFill>
-                        <a:srgbClr val="F3CED7"/>
+                        <a:srgbClr val="F7D4DD"/>
                       </a:solidFill>
                       <a:prstDash val="solid"/>
                     </a:lnT>
                     <a:lnB w="9525" cap="flat" cmpd="sng" algn="ctr">
                       <a:solidFill>
-                        <a:srgbClr val="F3CED7"/>
+                        <a:srgbClr val="F7D4DD"/>
                       </a:solidFill>
                       <a:prstDash val="solid"/>
                     </a:lnB>
                     <a:solidFill>
-                      <a:srgbClr val="FAEFF2"/>
+                      <a:srgbClr val="FCF3F5"/>
                     </a:solidFill>
                   </a:tcPr>
                 </a:tc>
@@ -4095,30 +4095,30 @@
                   <a:tcPr anchor="ctr" marL="73152" marR="73152">
                     <a:lnL w="9525" cap="flat" cmpd="sng" algn="ctr">
                       <a:solidFill>
-                        <a:srgbClr val="F3CED7"/>
+                        <a:srgbClr val="F7D4DD"/>
                       </a:solidFill>
                       <a:prstDash val="solid"/>
                     </a:lnL>
                     <a:lnR w="9525" cap="flat" cmpd="sng" algn="ctr">
                       <a:solidFill>
-                        <a:srgbClr val="F3CED7"/>
+                        <a:srgbClr val="F7D4DD"/>
                       </a:solidFill>
                       <a:prstDash val="solid"/>
                     </a:lnR>
                     <a:lnT w="9525" cap="flat" cmpd="sng" algn="ctr">
                       <a:solidFill>
-                        <a:srgbClr val="F3CED7"/>
+                        <a:srgbClr val="F7D4DD"/>
                       </a:solidFill>
                       <a:prstDash val="solid"/>
                     </a:lnT>
                     <a:lnB w="9525" cap="flat" cmpd="sng" algn="ctr">
                       <a:solidFill>
-                        <a:srgbClr val="F3CED7"/>
+                        <a:srgbClr val="F7D4DD"/>
                       </a:solidFill>
                       <a:prstDash val="solid"/>
                     </a:lnB>
                     <a:solidFill>
-                      <a:srgbClr val="FAEFF2"/>
+                      <a:srgbClr val="FCF3F5"/>
                     </a:solidFill>
                   </a:tcPr>
                 </a:tc>
@@ -4133,7 +4133,7 @@
                       <a:r>
                         <a:rPr sz="1600" b="1">
                           <a:solidFill>
-                            <a:srgbClr val="9E2E4A"/>
+                            <a:srgbClr val="721D32"/>
                           </a:solidFill>
                         </a:rPr>
                         <a:t>직업·학교</a:t>
@@ -4143,30 +4143,30 @@
                   <a:tcPr anchor="ctr" marL="73152" marR="73152">
                     <a:lnL w="9525" cap="flat" cmpd="sng" algn="ctr">
                       <a:solidFill>
-                        <a:srgbClr val="F3CED7"/>
+                        <a:srgbClr val="F7D4DD"/>
                       </a:solidFill>
                       <a:prstDash val="solid"/>
                     </a:lnL>
                     <a:lnR w="9525" cap="flat" cmpd="sng" algn="ctr">
                       <a:solidFill>
-                        <a:srgbClr val="F3CED7"/>
+                        <a:srgbClr val="F7D4DD"/>
                       </a:solidFill>
                       <a:prstDash val="solid"/>
                     </a:lnR>
                     <a:lnT w="9525" cap="flat" cmpd="sng" algn="ctr">
                       <a:solidFill>
-                        <a:srgbClr val="F3CED7"/>
+                        <a:srgbClr val="F7D4DD"/>
                       </a:solidFill>
                       <a:prstDash val="solid"/>
                     </a:lnT>
                     <a:lnB w="9525" cap="flat" cmpd="sng" algn="ctr">
                       <a:solidFill>
-                        <a:srgbClr val="F3CED7"/>
+                        <a:srgbClr val="F7D4DD"/>
                       </a:solidFill>
                       <a:prstDash val="solid"/>
                     </a:lnB>
                     <a:solidFill>
-                      <a:srgbClr val="F3CED7"/>
+                      <a:srgbClr val="F7D4DD"/>
                     </a:solidFill>
                   </a:tcPr>
                 </a:tc>
@@ -4189,25 +4189,25 @@
                   <a:tcPr anchor="ctr" marL="73152" marR="73152">
                     <a:lnL w="9525" cap="flat" cmpd="sng" algn="ctr">
                       <a:solidFill>
-                        <a:srgbClr val="F3CED7"/>
+                        <a:srgbClr val="F7D4DD"/>
                       </a:solidFill>
                       <a:prstDash val="solid"/>
                     </a:lnL>
                     <a:lnR w="9525" cap="flat" cmpd="sng" algn="ctr">
                       <a:solidFill>
-                        <a:srgbClr val="F3CED7"/>
+                        <a:srgbClr val="F7D4DD"/>
                       </a:solidFill>
                       <a:prstDash val="solid"/>
                     </a:lnR>
                     <a:lnT w="9525" cap="flat" cmpd="sng" algn="ctr">
                       <a:solidFill>
-                        <a:srgbClr val="F3CED7"/>
+                        <a:srgbClr val="F7D4DD"/>
                       </a:solidFill>
                       <a:prstDash val="solid"/>
                     </a:lnT>
                     <a:lnB w="9525" cap="flat" cmpd="sng" algn="ctr">
                       <a:solidFill>
-                        <a:srgbClr val="F3CED7"/>
+                        <a:srgbClr val="F7D4DD"/>
                       </a:solidFill>
                       <a:prstDash val="solid"/>
                     </a:lnB>
@@ -4235,25 +4235,25 @@
                   <a:tcPr anchor="ctr" marL="73152" marR="73152">
                     <a:lnL w="9525" cap="flat" cmpd="sng" algn="ctr">
                       <a:solidFill>
-                        <a:srgbClr val="F3CED7"/>
+                        <a:srgbClr val="F7D4DD"/>
                       </a:solidFill>
                       <a:prstDash val="solid"/>
                     </a:lnL>
                     <a:lnR w="9525" cap="flat" cmpd="sng" algn="ctr">
                       <a:solidFill>
-                        <a:srgbClr val="F3CED7"/>
+                        <a:srgbClr val="F7D4DD"/>
                       </a:solidFill>
                       <a:prstDash val="solid"/>
                     </a:lnR>
                     <a:lnT w="9525" cap="flat" cmpd="sng" algn="ctr">
                       <a:solidFill>
-                        <a:srgbClr val="F3CED7"/>
+                        <a:srgbClr val="F7D4DD"/>
                       </a:solidFill>
                       <a:prstDash val="solid"/>
                     </a:lnT>
                     <a:lnB w="9525" cap="flat" cmpd="sng" algn="ctr">
                       <a:solidFill>
-                        <a:srgbClr val="F3CED7"/>
+                        <a:srgbClr val="F7D4DD"/>
                       </a:solidFill>
                       <a:prstDash val="solid"/>
                     </a:lnB>
@@ -4281,25 +4281,25 @@
                   <a:tcPr anchor="ctr" marL="73152" marR="73152">
                     <a:lnL w="9525" cap="flat" cmpd="sng" algn="ctr">
                       <a:solidFill>
-                        <a:srgbClr val="F3CED7"/>
+                        <a:srgbClr val="F7D4DD"/>
                       </a:solidFill>
                       <a:prstDash val="solid"/>
                     </a:lnL>
                     <a:lnR w="9525" cap="flat" cmpd="sng" algn="ctr">
                       <a:solidFill>
-                        <a:srgbClr val="F3CED7"/>
+                        <a:srgbClr val="F7D4DD"/>
                       </a:solidFill>
                       <a:prstDash val="solid"/>
                     </a:lnR>
                     <a:lnT w="9525" cap="flat" cmpd="sng" algn="ctr">
                       <a:solidFill>
-                        <a:srgbClr val="F3CED7"/>
+                        <a:srgbClr val="F7D4DD"/>
                       </a:solidFill>
                       <a:prstDash val="solid"/>
                     </a:lnT>
                     <a:lnB w="9525" cap="flat" cmpd="sng" algn="ctr">
                       <a:solidFill>
-                        <a:srgbClr val="F3CED7"/>
+                        <a:srgbClr val="F7D4DD"/>
                       </a:solidFill>
                       <a:prstDash val="solid"/>
                     </a:lnB>
@@ -4319,7 +4319,7 @@
                       <a:r>
                         <a:rPr sz="1600" b="1">
                           <a:solidFill>
-                            <a:srgbClr val="9E2E4A"/>
+                            <a:srgbClr val="721D32"/>
                           </a:solidFill>
                         </a:rPr>
                         <a:t>메모</a:t>
@@ -4329,30 +4329,30 @@
                   <a:tcPr anchor="ctr" marL="73152" marR="73152">
                     <a:lnL w="9525" cap="flat" cmpd="sng" algn="ctr">
                       <a:solidFill>
-                        <a:srgbClr val="F3CED7"/>
+                        <a:srgbClr val="F7D4DD"/>
                       </a:solidFill>
                       <a:prstDash val="solid"/>
                     </a:lnL>
                     <a:lnR w="9525" cap="flat" cmpd="sng" algn="ctr">
                       <a:solidFill>
-                        <a:srgbClr val="F3CED7"/>
+                        <a:srgbClr val="F7D4DD"/>
                       </a:solidFill>
                       <a:prstDash val="solid"/>
                     </a:lnR>
                     <a:lnT w="9525" cap="flat" cmpd="sng" algn="ctr">
                       <a:solidFill>
-                        <a:srgbClr val="F3CED7"/>
+                        <a:srgbClr val="F7D4DD"/>
                       </a:solidFill>
                       <a:prstDash val="solid"/>
                     </a:lnT>
                     <a:lnB w="9525" cap="flat" cmpd="sng" algn="ctr">
                       <a:solidFill>
-                        <a:srgbClr val="F3CED7"/>
+                        <a:srgbClr val="F7D4DD"/>
                       </a:solidFill>
                       <a:prstDash val="solid"/>
                     </a:lnB>
                     <a:solidFill>
-                      <a:srgbClr val="F3CED7"/>
+                      <a:srgbClr val="F7D4DD"/>
                     </a:solidFill>
                   </a:tcPr>
                 </a:tc>
@@ -4375,30 +4375,30 @@
                   <a:tcPr anchor="ctr" marL="73152" marR="73152">
                     <a:lnL w="9525" cap="flat" cmpd="sng" algn="ctr">
                       <a:solidFill>
-                        <a:srgbClr val="F3CED7"/>
+                        <a:srgbClr val="F7D4DD"/>
                       </a:solidFill>
                       <a:prstDash val="solid"/>
                     </a:lnL>
                     <a:lnR w="9525" cap="flat" cmpd="sng" algn="ctr">
                       <a:solidFill>
-                        <a:srgbClr val="F3CED7"/>
+                        <a:srgbClr val="F7D4DD"/>
                       </a:solidFill>
                       <a:prstDash val="solid"/>
                     </a:lnR>
                     <a:lnT w="9525" cap="flat" cmpd="sng" algn="ctr">
                       <a:solidFill>
-                        <a:srgbClr val="F3CED7"/>
+                        <a:srgbClr val="F7D4DD"/>
                       </a:solidFill>
                       <a:prstDash val="solid"/>
                     </a:lnT>
                     <a:lnB w="9525" cap="flat" cmpd="sng" algn="ctr">
                       <a:solidFill>
-                        <a:srgbClr val="F3CED7"/>
+                        <a:srgbClr val="F7D4DD"/>
                       </a:solidFill>
                       <a:prstDash val="solid"/>
                     </a:lnB>
                     <a:solidFill>
-                      <a:srgbClr val="FAEFF2"/>
+                      <a:srgbClr val="FCF3F5"/>
                     </a:solidFill>
                   </a:tcPr>
                 </a:tc>
@@ -4421,30 +4421,30 @@
                   <a:tcPr anchor="ctr" marL="73152" marR="73152">
                     <a:lnL w="9525" cap="flat" cmpd="sng" algn="ctr">
                       <a:solidFill>
-                        <a:srgbClr val="F3CED7"/>
+                        <a:srgbClr val="F7D4DD"/>
                       </a:solidFill>
                       <a:prstDash val="solid"/>
                     </a:lnL>
                     <a:lnR w="9525" cap="flat" cmpd="sng" algn="ctr">
                       <a:solidFill>
-                        <a:srgbClr val="F3CED7"/>
+                        <a:srgbClr val="F7D4DD"/>
                       </a:solidFill>
                       <a:prstDash val="solid"/>
                     </a:lnR>
                     <a:lnT w="9525" cap="flat" cmpd="sng" algn="ctr">
                       <a:solidFill>
-                        <a:srgbClr val="F3CED7"/>
+                        <a:srgbClr val="F7D4DD"/>
                       </a:solidFill>
                       <a:prstDash val="solid"/>
                     </a:lnT>
                     <a:lnB w="9525" cap="flat" cmpd="sng" algn="ctr">
                       <a:solidFill>
-                        <a:srgbClr val="F3CED7"/>
+                        <a:srgbClr val="F7D4DD"/>
                       </a:solidFill>
                       <a:prstDash val="solid"/>
                     </a:lnB>
                     <a:solidFill>
-                      <a:srgbClr val="FAEFF2"/>
+                      <a:srgbClr val="FCF3F5"/>
                     </a:solidFill>
                   </a:tcPr>
                 </a:tc>
@@ -4467,30 +4467,30 @@
                   <a:tcPr anchor="ctr" marL="73152" marR="73152">
                     <a:lnL w="9525" cap="flat" cmpd="sng" algn="ctr">
                       <a:solidFill>
-                        <a:srgbClr val="F3CED7"/>
+                        <a:srgbClr val="F7D4DD"/>
                       </a:solidFill>
                       <a:prstDash val="solid"/>
                     </a:lnL>
                     <a:lnR w="9525" cap="flat" cmpd="sng" algn="ctr">
                       <a:solidFill>
-                        <a:srgbClr val="F3CED7"/>
+                        <a:srgbClr val="F7D4DD"/>
                       </a:solidFill>
                       <a:prstDash val="solid"/>
                     </a:lnR>
                     <a:lnT w="9525" cap="flat" cmpd="sng" algn="ctr">
                       <a:solidFill>
-                        <a:srgbClr val="F3CED7"/>
+                        <a:srgbClr val="F7D4DD"/>
                       </a:solidFill>
                       <a:prstDash val="solid"/>
                     </a:lnT>
                     <a:lnB w="9525" cap="flat" cmpd="sng" algn="ctr">
                       <a:solidFill>
-                        <a:srgbClr val="F3CED7"/>
+                        <a:srgbClr val="F7D4DD"/>
                       </a:solidFill>
                       <a:prstDash val="solid"/>
                     </a:lnB>
                     <a:solidFill>
-                      <a:srgbClr val="FAEFF2"/>
+                      <a:srgbClr val="FCF3F5"/>
                     </a:solidFill>
                   </a:tcPr>
                 </a:tc>
@@ -4513,7 +4513,7 @@
     <p:bg>
       <p:bgPr>
         <a:solidFill>
-          <a:srgbClr val="D1617D"/>
+          <a:srgbClr val="DB3D65"/>
         </a:solidFill>
         <a:effectLst/>
       </p:bgPr>
@@ -4586,7 +4586,7 @@
             <a:r>
               <a:rPr sz="3000" b="1" i="0">
                 <a:solidFill>
-                  <a:srgbClr val="9E2E4A"/>
+                  <a:srgbClr val="721D32"/>
                 </a:solidFill>
               </a:rPr>
               <a:t>가입한 보험 목록</a:t>
@@ -4639,30 +4639,30 @@
                   <a:tcPr anchor="ctr" marL="73152" marR="73152">
                     <a:lnL w="9525" cap="flat" cmpd="sng" algn="ctr">
                       <a:solidFill>
-                        <a:srgbClr val="D1617D"/>
+                        <a:srgbClr val="DB3D65"/>
                       </a:solidFill>
                       <a:prstDash val="solid"/>
                     </a:lnL>
                     <a:lnR w="9525" cap="flat" cmpd="sng" algn="ctr">
                       <a:solidFill>
-                        <a:srgbClr val="D1617D"/>
+                        <a:srgbClr val="DB3D65"/>
                       </a:solidFill>
                       <a:prstDash val="solid"/>
                     </a:lnR>
                     <a:lnT w="9525" cap="flat" cmpd="sng" algn="ctr">
                       <a:solidFill>
-                        <a:srgbClr val="D1617D"/>
+                        <a:srgbClr val="DB3D65"/>
                       </a:solidFill>
                       <a:prstDash val="solid"/>
                     </a:lnT>
                     <a:lnB w="9525" cap="flat" cmpd="sng" algn="ctr">
                       <a:solidFill>
-                        <a:srgbClr val="D1617D"/>
+                        <a:srgbClr val="DB3D65"/>
                       </a:solidFill>
                       <a:prstDash val="solid"/>
                     </a:lnB>
                     <a:solidFill>
-                      <a:srgbClr val="D1617D"/>
+                      <a:srgbClr val="DB3D65"/>
                     </a:solidFill>
                   </a:tcPr>
                 </a:tc>
@@ -4685,30 +4685,30 @@
                   <a:tcPr anchor="ctr" marL="73152" marR="73152">
                     <a:lnL w="9525" cap="flat" cmpd="sng" algn="ctr">
                       <a:solidFill>
-                        <a:srgbClr val="D1617D"/>
+                        <a:srgbClr val="DB3D65"/>
                       </a:solidFill>
                       <a:prstDash val="solid"/>
                     </a:lnL>
                     <a:lnR w="9525" cap="flat" cmpd="sng" algn="ctr">
                       <a:solidFill>
-                        <a:srgbClr val="D1617D"/>
+                        <a:srgbClr val="DB3D65"/>
                       </a:solidFill>
                       <a:prstDash val="solid"/>
                     </a:lnR>
                     <a:lnT w="9525" cap="flat" cmpd="sng" algn="ctr">
                       <a:solidFill>
-                        <a:srgbClr val="D1617D"/>
+                        <a:srgbClr val="DB3D65"/>
                       </a:solidFill>
                       <a:prstDash val="solid"/>
                     </a:lnT>
                     <a:lnB w="9525" cap="flat" cmpd="sng" algn="ctr">
                       <a:solidFill>
-                        <a:srgbClr val="D1617D"/>
+                        <a:srgbClr val="DB3D65"/>
                       </a:solidFill>
                       <a:prstDash val="solid"/>
                     </a:lnB>
                     <a:solidFill>
-                      <a:srgbClr val="D1617D"/>
+                      <a:srgbClr val="DB3D65"/>
                     </a:solidFill>
                   </a:tcPr>
                 </a:tc>
@@ -4731,30 +4731,30 @@
                   <a:tcPr anchor="ctr" marL="73152" marR="73152">
                     <a:lnL w="9525" cap="flat" cmpd="sng" algn="ctr">
                       <a:solidFill>
-                        <a:srgbClr val="D1617D"/>
+                        <a:srgbClr val="DB3D65"/>
                       </a:solidFill>
                       <a:prstDash val="solid"/>
                     </a:lnL>
                     <a:lnR w="9525" cap="flat" cmpd="sng" algn="ctr">
                       <a:solidFill>
-                        <a:srgbClr val="D1617D"/>
+                        <a:srgbClr val="DB3D65"/>
                       </a:solidFill>
                       <a:prstDash val="solid"/>
                     </a:lnR>
                     <a:lnT w="9525" cap="flat" cmpd="sng" algn="ctr">
                       <a:solidFill>
-                        <a:srgbClr val="D1617D"/>
+                        <a:srgbClr val="DB3D65"/>
                       </a:solidFill>
                       <a:prstDash val="solid"/>
                     </a:lnT>
                     <a:lnB w="9525" cap="flat" cmpd="sng" algn="ctr">
                       <a:solidFill>
-                        <a:srgbClr val="D1617D"/>
+                        <a:srgbClr val="DB3D65"/>
                       </a:solidFill>
                       <a:prstDash val="solid"/>
                     </a:lnB>
                     <a:solidFill>
-                      <a:srgbClr val="D1617D"/>
+                      <a:srgbClr val="DB3D65"/>
                     </a:solidFill>
                   </a:tcPr>
                 </a:tc>
@@ -4777,30 +4777,30 @@
                   <a:tcPr anchor="ctr" marL="73152" marR="73152">
                     <a:lnL w="9525" cap="flat" cmpd="sng" algn="ctr">
                       <a:solidFill>
-                        <a:srgbClr val="D1617D"/>
+                        <a:srgbClr val="DB3D65"/>
                       </a:solidFill>
                       <a:prstDash val="solid"/>
                     </a:lnL>
                     <a:lnR w="9525" cap="flat" cmpd="sng" algn="ctr">
                       <a:solidFill>
-                        <a:srgbClr val="D1617D"/>
+                        <a:srgbClr val="DB3D65"/>
                       </a:solidFill>
                       <a:prstDash val="solid"/>
                     </a:lnR>
                     <a:lnT w="9525" cap="flat" cmpd="sng" algn="ctr">
                       <a:solidFill>
-                        <a:srgbClr val="D1617D"/>
+                        <a:srgbClr val="DB3D65"/>
                       </a:solidFill>
                       <a:prstDash val="solid"/>
                     </a:lnT>
                     <a:lnB w="9525" cap="flat" cmpd="sng" algn="ctr">
                       <a:solidFill>
-                        <a:srgbClr val="D1617D"/>
+                        <a:srgbClr val="DB3D65"/>
                       </a:solidFill>
                       <a:prstDash val="solid"/>
                     </a:lnB>
                     <a:solidFill>
-                      <a:srgbClr val="D1617D"/>
+                      <a:srgbClr val="DB3D65"/>
                     </a:solidFill>
                   </a:tcPr>
                 </a:tc>
@@ -4823,30 +4823,30 @@
                   <a:tcPr anchor="ctr" marL="73152" marR="73152">
                     <a:lnL w="9525" cap="flat" cmpd="sng" algn="ctr">
                       <a:solidFill>
-                        <a:srgbClr val="D1617D"/>
+                        <a:srgbClr val="DB3D65"/>
                       </a:solidFill>
                       <a:prstDash val="solid"/>
                     </a:lnL>
                     <a:lnR w="9525" cap="flat" cmpd="sng" algn="ctr">
                       <a:solidFill>
-                        <a:srgbClr val="D1617D"/>
+                        <a:srgbClr val="DB3D65"/>
                       </a:solidFill>
                       <a:prstDash val="solid"/>
                     </a:lnR>
                     <a:lnT w="9525" cap="flat" cmpd="sng" algn="ctr">
                       <a:solidFill>
-                        <a:srgbClr val="D1617D"/>
+                        <a:srgbClr val="DB3D65"/>
                       </a:solidFill>
                       <a:prstDash val="solid"/>
                     </a:lnT>
                     <a:lnB w="9525" cap="flat" cmpd="sng" algn="ctr">
                       <a:solidFill>
-                        <a:srgbClr val="D1617D"/>
+                        <a:srgbClr val="DB3D65"/>
                       </a:solidFill>
                       <a:prstDash val="solid"/>
                     </a:lnB>
                     <a:solidFill>
-                      <a:srgbClr val="D1617D"/>
+                      <a:srgbClr val="DB3D65"/>
                     </a:solidFill>
                   </a:tcPr>
                 </a:tc>
@@ -4871,25 +4871,25 @@
                   <a:tcPr anchor="ctr" marL="73152" marR="73152">
                     <a:lnL w="9525" cap="flat" cmpd="sng" algn="ctr">
                       <a:solidFill>
-                        <a:srgbClr val="F3CED7"/>
+                        <a:srgbClr val="F7D4DD"/>
                       </a:solidFill>
                       <a:prstDash val="solid"/>
                     </a:lnL>
                     <a:lnR w="9525" cap="flat" cmpd="sng" algn="ctr">
                       <a:solidFill>
-                        <a:srgbClr val="F3CED7"/>
+                        <a:srgbClr val="F7D4DD"/>
                       </a:solidFill>
                       <a:prstDash val="solid"/>
                     </a:lnR>
                     <a:lnT w="9525" cap="flat" cmpd="sng" algn="ctr">
                       <a:solidFill>
-                        <a:srgbClr val="F3CED7"/>
+                        <a:srgbClr val="F7D4DD"/>
                       </a:solidFill>
                       <a:prstDash val="solid"/>
                     </a:lnT>
                     <a:lnB w="9525" cap="flat" cmpd="sng" algn="ctr">
                       <a:solidFill>
-                        <a:srgbClr val="F3CED7"/>
+                        <a:srgbClr val="F7D4DD"/>
                       </a:solidFill>
                       <a:prstDash val="solid"/>
                     </a:lnB>
@@ -4917,25 +4917,25 @@
                   <a:tcPr anchor="ctr" marL="73152" marR="73152">
                     <a:lnL w="9525" cap="flat" cmpd="sng" algn="ctr">
                       <a:solidFill>
-                        <a:srgbClr val="F3CED7"/>
+                        <a:srgbClr val="F7D4DD"/>
                       </a:solidFill>
                       <a:prstDash val="solid"/>
                     </a:lnL>
                     <a:lnR w="9525" cap="flat" cmpd="sng" algn="ctr">
                       <a:solidFill>
-                        <a:srgbClr val="F3CED7"/>
+                        <a:srgbClr val="F7D4DD"/>
                       </a:solidFill>
                       <a:prstDash val="solid"/>
                     </a:lnR>
                     <a:lnT w="9525" cap="flat" cmpd="sng" algn="ctr">
                       <a:solidFill>
-                        <a:srgbClr val="F3CED7"/>
+                        <a:srgbClr val="F7D4DD"/>
                       </a:solidFill>
                       <a:prstDash val="solid"/>
                     </a:lnT>
                     <a:lnB w="9525" cap="flat" cmpd="sng" algn="ctr">
                       <a:solidFill>
-                        <a:srgbClr val="F3CED7"/>
+                        <a:srgbClr val="F7D4DD"/>
                       </a:solidFill>
                       <a:prstDash val="solid"/>
                     </a:lnB>
@@ -4963,25 +4963,25 @@
                   <a:tcPr anchor="ctr" marL="73152" marR="73152">
                     <a:lnL w="9525" cap="flat" cmpd="sng" algn="ctr">
                       <a:solidFill>
-                        <a:srgbClr val="F3CED7"/>
+                        <a:srgbClr val="F7D4DD"/>
                       </a:solidFill>
                       <a:prstDash val="solid"/>
                     </a:lnL>
                     <a:lnR w="9525" cap="flat" cmpd="sng" algn="ctr">
                       <a:solidFill>
-                        <a:srgbClr val="F3CED7"/>
+                        <a:srgbClr val="F7D4DD"/>
                       </a:solidFill>
                       <a:prstDash val="solid"/>
                     </a:lnR>
                     <a:lnT w="9525" cap="flat" cmpd="sng" algn="ctr">
                       <a:solidFill>
-                        <a:srgbClr val="F3CED7"/>
+                        <a:srgbClr val="F7D4DD"/>
                       </a:solidFill>
                       <a:prstDash val="solid"/>
                     </a:lnT>
                     <a:lnB w="9525" cap="flat" cmpd="sng" algn="ctr">
                       <a:solidFill>
-                        <a:srgbClr val="F3CED7"/>
+                        <a:srgbClr val="F7D4DD"/>
                       </a:solidFill>
                       <a:prstDash val="solid"/>
                     </a:lnB>
@@ -5009,25 +5009,25 @@
                   <a:tcPr anchor="ctr" marL="73152" marR="73152">
                     <a:lnL w="9525" cap="flat" cmpd="sng" algn="ctr">
                       <a:solidFill>
-                        <a:srgbClr val="F3CED7"/>
+                        <a:srgbClr val="F7D4DD"/>
                       </a:solidFill>
                       <a:prstDash val="solid"/>
                     </a:lnL>
                     <a:lnR w="9525" cap="flat" cmpd="sng" algn="ctr">
                       <a:solidFill>
-                        <a:srgbClr val="F3CED7"/>
+                        <a:srgbClr val="F7D4DD"/>
                       </a:solidFill>
                       <a:prstDash val="solid"/>
                     </a:lnR>
                     <a:lnT w="9525" cap="flat" cmpd="sng" algn="ctr">
                       <a:solidFill>
-                        <a:srgbClr val="F3CED7"/>
+                        <a:srgbClr val="F7D4DD"/>
                       </a:solidFill>
                       <a:prstDash val="solid"/>
                     </a:lnT>
                     <a:lnB w="9525" cap="flat" cmpd="sng" algn="ctr">
                       <a:solidFill>
-                        <a:srgbClr val="F3CED7"/>
+                        <a:srgbClr val="F7D4DD"/>
                       </a:solidFill>
                       <a:prstDash val="solid"/>
                     </a:lnB>
@@ -5055,25 +5055,25 @@
                   <a:tcPr anchor="ctr" marL="73152" marR="73152">
                     <a:lnL w="9525" cap="flat" cmpd="sng" algn="ctr">
                       <a:solidFill>
-                        <a:srgbClr val="F3CED7"/>
+                        <a:srgbClr val="F7D4DD"/>
                       </a:solidFill>
                       <a:prstDash val="solid"/>
                     </a:lnL>
                     <a:lnR w="9525" cap="flat" cmpd="sng" algn="ctr">
                       <a:solidFill>
-                        <a:srgbClr val="F3CED7"/>
+                        <a:srgbClr val="F7D4DD"/>
                       </a:solidFill>
                       <a:prstDash val="solid"/>
                     </a:lnR>
                     <a:lnT w="9525" cap="flat" cmpd="sng" algn="ctr">
                       <a:solidFill>
-                        <a:srgbClr val="F3CED7"/>
+                        <a:srgbClr val="F7D4DD"/>
                       </a:solidFill>
                       <a:prstDash val="solid"/>
                     </a:lnT>
                     <a:lnB w="9525" cap="flat" cmpd="sng" algn="ctr">
                       <a:solidFill>
-                        <a:srgbClr val="F3CED7"/>
+                        <a:srgbClr val="F7D4DD"/>
                       </a:solidFill>
                       <a:prstDash val="solid"/>
                     </a:lnB>
@@ -5103,30 +5103,30 @@
                   <a:tcPr anchor="ctr" marL="73152" marR="73152">
                     <a:lnL w="9525" cap="flat" cmpd="sng" algn="ctr">
                       <a:solidFill>
-                        <a:srgbClr val="F3CED7"/>
+                        <a:srgbClr val="F7D4DD"/>
                       </a:solidFill>
                       <a:prstDash val="solid"/>
                     </a:lnL>
                     <a:lnR w="9525" cap="flat" cmpd="sng" algn="ctr">
                       <a:solidFill>
-                        <a:srgbClr val="F3CED7"/>
+                        <a:srgbClr val="F7D4DD"/>
                       </a:solidFill>
                       <a:prstDash val="solid"/>
                     </a:lnR>
                     <a:lnT w="9525" cap="flat" cmpd="sng" algn="ctr">
                       <a:solidFill>
-                        <a:srgbClr val="F3CED7"/>
+                        <a:srgbClr val="F7D4DD"/>
                       </a:solidFill>
                       <a:prstDash val="solid"/>
                     </a:lnT>
                     <a:lnB w="9525" cap="flat" cmpd="sng" algn="ctr">
                       <a:solidFill>
-                        <a:srgbClr val="F3CED7"/>
+                        <a:srgbClr val="F7D4DD"/>
                       </a:solidFill>
                       <a:prstDash val="solid"/>
                     </a:lnB>
                     <a:solidFill>
-                      <a:srgbClr val="FAEFF2"/>
+                      <a:srgbClr val="FCF3F5"/>
                     </a:solidFill>
                   </a:tcPr>
                 </a:tc>
@@ -5149,30 +5149,30 @@
                   <a:tcPr anchor="ctr" marL="73152" marR="73152">
                     <a:lnL w="9525" cap="flat" cmpd="sng" algn="ctr">
                       <a:solidFill>
-                        <a:srgbClr val="F3CED7"/>
+                        <a:srgbClr val="F7D4DD"/>
                       </a:solidFill>
                       <a:prstDash val="solid"/>
                     </a:lnL>
                     <a:lnR w="9525" cap="flat" cmpd="sng" algn="ctr">
                       <a:solidFill>
-                        <a:srgbClr val="F3CED7"/>
+                        <a:srgbClr val="F7D4DD"/>
                       </a:solidFill>
                       <a:prstDash val="solid"/>
                     </a:lnR>
                     <a:lnT w="9525" cap="flat" cmpd="sng" algn="ctr">
                       <a:solidFill>
-                        <a:srgbClr val="F3CED7"/>
+                        <a:srgbClr val="F7D4DD"/>
                       </a:solidFill>
                       <a:prstDash val="solid"/>
                     </a:lnT>
                     <a:lnB w="9525" cap="flat" cmpd="sng" algn="ctr">
                       <a:solidFill>
-                        <a:srgbClr val="F3CED7"/>
+                        <a:srgbClr val="F7D4DD"/>
                       </a:solidFill>
                       <a:prstDash val="solid"/>
                     </a:lnB>
                     <a:solidFill>
-                      <a:srgbClr val="FAEFF2"/>
+                      <a:srgbClr val="FCF3F5"/>
                     </a:solidFill>
                   </a:tcPr>
                 </a:tc>
@@ -5195,30 +5195,30 @@
                   <a:tcPr anchor="ctr" marL="73152" marR="73152">
                     <a:lnL w="9525" cap="flat" cmpd="sng" algn="ctr">
                       <a:solidFill>
-                        <a:srgbClr val="F3CED7"/>
+                        <a:srgbClr val="F7D4DD"/>
                       </a:solidFill>
                       <a:prstDash val="solid"/>
                     </a:lnL>
                     <a:lnR w="9525" cap="flat" cmpd="sng" algn="ctr">
                       <a:solidFill>
-                        <a:srgbClr val="F3CED7"/>
+                        <a:srgbClr val="F7D4DD"/>
                       </a:solidFill>
                       <a:prstDash val="solid"/>
                     </a:lnR>
                     <a:lnT w="9525" cap="flat" cmpd="sng" algn="ctr">
                       <a:solidFill>
-                        <a:srgbClr val="F3CED7"/>
+                        <a:srgbClr val="F7D4DD"/>
                       </a:solidFill>
                       <a:prstDash val="solid"/>
                     </a:lnT>
                     <a:lnB w="9525" cap="flat" cmpd="sng" algn="ctr">
                       <a:solidFill>
-                        <a:srgbClr val="F3CED7"/>
+                        <a:srgbClr val="F7D4DD"/>
                       </a:solidFill>
                       <a:prstDash val="solid"/>
                     </a:lnB>
                     <a:solidFill>
-                      <a:srgbClr val="FAEFF2"/>
+                      <a:srgbClr val="FCF3F5"/>
                     </a:solidFill>
                   </a:tcPr>
                 </a:tc>
@@ -5241,30 +5241,30 @@
                   <a:tcPr anchor="ctr" marL="73152" marR="73152">
                     <a:lnL w="9525" cap="flat" cmpd="sng" algn="ctr">
                       <a:solidFill>
-                        <a:srgbClr val="F3CED7"/>
+                        <a:srgbClr val="F7D4DD"/>
                       </a:solidFill>
                       <a:prstDash val="solid"/>
                     </a:lnL>
                     <a:lnR w="9525" cap="flat" cmpd="sng" algn="ctr">
                       <a:solidFill>
-                        <a:srgbClr val="F3CED7"/>
+                        <a:srgbClr val="F7D4DD"/>
                       </a:solidFill>
                       <a:prstDash val="solid"/>
                     </a:lnR>
                     <a:lnT w="9525" cap="flat" cmpd="sng" algn="ctr">
                       <a:solidFill>
-                        <a:srgbClr val="F3CED7"/>
+                        <a:srgbClr val="F7D4DD"/>
                       </a:solidFill>
                       <a:prstDash val="solid"/>
                     </a:lnT>
                     <a:lnB w="9525" cap="flat" cmpd="sng" algn="ctr">
                       <a:solidFill>
-                        <a:srgbClr val="F3CED7"/>
+                        <a:srgbClr val="F7D4DD"/>
                       </a:solidFill>
                       <a:prstDash val="solid"/>
                     </a:lnB>
                     <a:solidFill>
-                      <a:srgbClr val="FAEFF2"/>
+                      <a:srgbClr val="FCF3F5"/>
                     </a:solidFill>
                   </a:tcPr>
                 </a:tc>
@@ -5287,30 +5287,30 @@
                   <a:tcPr anchor="ctr" marL="73152" marR="73152">
                     <a:lnL w="9525" cap="flat" cmpd="sng" algn="ctr">
                       <a:solidFill>
-                        <a:srgbClr val="F3CED7"/>
+                        <a:srgbClr val="F7D4DD"/>
                       </a:solidFill>
                       <a:prstDash val="solid"/>
                     </a:lnL>
                     <a:lnR w="9525" cap="flat" cmpd="sng" algn="ctr">
                       <a:solidFill>
-                        <a:srgbClr val="F3CED7"/>
+                        <a:srgbClr val="F7D4DD"/>
                       </a:solidFill>
                       <a:prstDash val="solid"/>
                     </a:lnR>
                     <a:lnT w="9525" cap="flat" cmpd="sng" algn="ctr">
                       <a:solidFill>
-                        <a:srgbClr val="F3CED7"/>
+                        <a:srgbClr val="F7D4DD"/>
                       </a:solidFill>
                       <a:prstDash val="solid"/>
                     </a:lnT>
                     <a:lnB w="9525" cap="flat" cmpd="sng" algn="ctr">
                       <a:solidFill>
-                        <a:srgbClr val="F3CED7"/>
+                        <a:srgbClr val="F7D4DD"/>
                       </a:solidFill>
                       <a:prstDash val="solid"/>
                     </a:lnB>
                     <a:solidFill>
-                      <a:srgbClr val="FAEFF2"/>
+                      <a:srgbClr val="FCF3F5"/>
                     </a:solidFill>
                   </a:tcPr>
                 </a:tc>
@@ -5335,25 +5335,25 @@
                   <a:tcPr anchor="ctr" marL="73152" marR="73152">
                     <a:lnL w="9525" cap="flat" cmpd="sng" algn="ctr">
                       <a:solidFill>
-                        <a:srgbClr val="F3CED7"/>
+                        <a:srgbClr val="F7D4DD"/>
                       </a:solidFill>
                       <a:prstDash val="solid"/>
                     </a:lnL>
                     <a:lnR w="9525" cap="flat" cmpd="sng" algn="ctr">
                       <a:solidFill>
-                        <a:srgbClr val="F3CED7"/>
+                        <a:srgbClr val="F7D4DD"/>
                       </a:solidFill>
                       <a:prstDash val="solid"/>
                     </a:lnR>
                     <a:lnT w="9525" cap="flat" cmpd="sng" algn="ctr">
                       <a:solidFill>
-                        <a:srgbClr val="F3CED7"/>
+                        <a:srgbClr val="F7D4DD"/>
                       </a:solidFill>
                       <a:prstDash val="solid"/>
                     </a:lnT>
                     <a:lnB w="9525" cap="flat" cmpd="sng" algn="ctr">
                       <a:solidFill>
-                        <a:srgbClr val="F3CED7"/>
+                        <a:srgbClr val="F7D4DD"/>
                       </a:solidFill>
                       <a:prstDash val="solid"/>
                     </a:lnB>
@@ -5381,25 +5381,25 @@
                   <a:tcPr anchor="ctr" marL="73152" marR="73152">
                     <a:lnL w="9525" cap="flat" cmpd="sng" algn="ctr">
                       <a:solidFill>
-                        <a:srgbClr val="F3CED7"/>
+                        <a:srgbClr val="F7D4DD"/>
                       </a:solidFill>
                       <a:prstDash val="solid"/>
                     </a:lnL>
                     <a:lnR w="9525" cap="flat" cmpd="sng" algn="ctr">
                       <a:solidFill>
-                        <a:srgbClr val="F3CED7"/>
+                        <a:srgbClr val="F7D4DD"/>
                       </a:solidFill>
                       <a:prstDash val="solid"/>
                     </a:lnR>
                     <a:lnT w="9525" cap="flat" cmpd="sng" algn="ctr">
                       <a:solidFill>
-                        <a:srgbClr val="F3CED7"/>
+                        <a:srgbClr val="F7D4DD"/>
                       </a:solidFill>
                       <a:prstDash val="solid"/>
                     </a:lnT>
                     <a:lnB w="9525" cap="flat" cmpd="sng" algn="ctr">
                       <a:solidFill>
-                        <a:srgbClr val="F3CED7"/>
+                        <a:srgbClr val="F7D4DD"/>
                       </a:solidFill>
                       <a:prstDash val="solid"/>
                     </a:lnB>
@@ -5427,25 +5427,25 @@
                   <a:tcPr anchor="ctr" marL="73152" marR="73152">
                     <a:lnL w="9525" cap="flat" cmpd="sng" algn="ctr">
                       <a:solidFill>
-                        <a:srgbClr val="F3CED7"/>
+                        <a:srgbClr val="F7D4DD"/>
                       </a:solidFill>
                       <a:prstDash val="solid"/>
                     </a:lnL>
                     <a:lnR w="9525" cap="flat" cmpd="sng" algn="ctr">
                       <a:solidFill>
-                        <a:srgbClr val="F3CED7"/>
+                        <a:srgbClr val="F7D4DD"/>
                       </a:solidFill>
                       <a:prstDash val="solid"/>
                     </a:lnR>
                     <a:lnT w="9525" cap="flat" cmpd="sng" algn="ctr">
                       <a:solidFill>
-                        <a:srgbClr val="F3CED7"/>
+                        <a:srgbClr val="F7D4DD"/>
                       </a:solidFill>
                       <a:prstDash val="solid"/>
                     </a:lnT>
                     <a:lnB w="9525" cap="flat" cmpd="sng" algn="ctr">
                       <a:solidFill>
-                        <a:srgbClr val="F3CED7"/>
+                        <a:srgbClr val="F7D4DD"/>
                       </a:solidFill>
                       <a:prstDash val="solid"/>
                     </a:lnB>
@@ -5473,25 +5473,25 @@
                   <a:tcPr anchor="ctr" marL="73152" marR="73152">
                     <a:lnL w="9525" cap="flat" cmpd="sng" algn="ctr">
                       <a:solidFill>
-                        <a:srgbClr val="F3CED7"/>
+                        <a:srgbClr val="F7D4DD"/>
                       </a:solidFill>
                       <a:prstDash val="solid"/>
                     </a:lnL>
                     <a:lnR w="9525" cap="flat" cmpd="sng" algn="ctr">
                       <a:solidFill>
-                        <a:srgbClr val="F3CED7"/>
+                        <a:srgbClr val="F7D4DD"/>
                       </a:solidFill>
                       <a:prstDash val="solid"/>
                     </a:lnR>
                     <a:lnT w="9525" cap="flat" cmpd="sng" algn="ctr">
                       <a:solidFill>
-                        <a:srgbClr val="F3CED7"/>
+                        <a:srgbClr val="F7D4DD"/>
                       </a:solidFill>
                       <a:prstDash val="solid"/>
                     </a:lnT>
                     <a:lnB w="9525" cap="flat" cmpd="sng" algn="ctr">
                       <a:solidFill>
-                        <a:srgbClr val="F3CED7"/>
+                        <a:srgbClr val="F7D4DD"/>
                       </a:solidFill>
                       <a:prstDash val="solid"/>
                     </a:lnB>
@@ -5519,25 +5519,25 @@
                   <a:tcPr anchor="ctr" marL="73152" marR="73152">
                     <a:lnL w="9525" cap="flat" cmpd="sng" algn="ctr">
                       <a:solidFill>
-                        <a:srgbClr val="F3CED7"/>
+                        <a:srgbClr val="F7D4DD"/>
                       </a:solidFill>
                       <a:prstDash val="solid"/>
                     </a:lnL>
                     <a:lnR w="9525" cap="flat" cmpd="sng" algn="ctr">
                       <a:solidFill>
-                        <a:srgbClr val="F3CED7"/>
+                        <a:srgbClr val="F7D4DD"/>
                       </a:solidFill>
                       <a:prstDash val="solid"/>
                     </a:lnR>
                     <a:lnT w="9525" cap="flat" cmpd="sng" algn="ctr">
                       <a:solidFill>
-                        <a:srgbClr val="F3CED7"/>
+                        <a:srgbClr val="F7D4DD"/>
                       </a:solidFill>
                       <a:prstDash val="solid"/>
                     </a:lnT>
                     <a:lnB w="9525" cap="flat" cmpd="sng" algn="ctr">
                       <a:solidFill>
-                        <a:srgbClr val="F3CED7"/>
+                        <a:srgbClr val="F7D4DD"/>
                       </a:solidFill>
                       <a:prstDash val="solid"/>
                     </a:lnB>
@@ -5567,30 +5567,30 @@
                   <a:tcPr anchor="ctr" marL="73152" marR="73152">
                     <a:lnL w="9525" cap="flat" cmpd="sng" algn="ctr">
                       <a:solidFill>
-                        <a:srgbClr val="F3CED7"/>
+                        <a:srgbClr val="F7D4DD"/>
                       </a:solidFill>
                       <a:prstDash val="solid"/>
                     </a:lnL>
                     <a:lnR w="9525" cap="flat" cmpd="sng" algn="ctr">
                       <a:solidFill>
-                        <a:srgbClr val="F3CED7"/>
+                        <a:srgbClr val="F7D4DD"/>
                       </a:solidFill>
                       <a:prstDash val="solid"/>
                     </a:lnR>
                     <a:lnT w="9525" cap="flat" cmpd="sng" algn="ctr">
                       <a:solidFill>
-                        <a:srgbClr val="F3CED7"/>
+                        <a:srgbClr val="F7D4DD"/>
                       </a:solidFill>
                       <a:prstDash val="solid"/>
                     </a:lnT>
                     <a:lnB w="9525" cap="flat" cmpd="sng" algn="ctr">
                       <a:solidFill>
-                        <a:srgbClr val="F3CED7"/>
+                        <a:srgbClr val="F7D4DD"/>
                       </a:solidFill>
                       <a:prstDash val="solid"/>
                     </a:lnB>
                     <a:solidFill>
-                      <a:srgbClr val="FAEFF2"/>
+                      <a:srgbClr val="FCF3F5"/>
                     </a:solidFill>
                   </a:tcPr>
                 </a:tc>
@@ -5613,30 +5613,30 @@
                   <a:tcPr anchor="ctr" marL="73152" marR="73152">
                     <a:lnL w="9525" cap="flat" cmpd="sng" algn="ctr">
                       <a:solidFill>
-                        <a:srgbClr val="F3CED7"/>
+                        <a:srgbClr val="F7D4DD"/>
                       </a:solidFill>
                       <a:prstDash val="solid"/>
                     </a:lnL>
                     <a:lnR w="9525" cap="flat" cmpd="sng" algn="ctr">
                       <a:solidFill>
-                        <a:srgbClr val="F3CED7"/>
+                        <a:srgbClr val="F7D4DD"/>
                       </a:solidFill>
                       <a:prstDash val="solid"/>
                     </a:lnR>
                     <a:lnT w="9525" cap="flat" cmpd="sng" algn="ctr">
                       <a:solidFill>
-                        <a:srgbClr val="F3CED7"/>
+                        <a:srgbClr val="F7D4DD"/>
                       </a:solidFill>
                       <a:prstDash val="solid"/>
                     </a:lnT>
                     <a:lnB w="9525" cap="flat" cmpd="sng" algn="ctr">
                       <a:solidFill>
-                        <a:srgbClr val="F3CED7"/>
+                        <a:srgbClr val="F7D4DD"/>
                       </a:solidFill>
                       <a:prstDash val="solid"/>
                     </a:lnB>
                     <a:solidFill>
-                      <a:srgbClr val="FAEFF2"/>
+                      <a:srgbClr val="FCF3F5"/>
                     </a:solidFill>
                   </a:tcPr>
                 </a:tc>
@@ -5659,30 +5659,30 @@
                   <a:tcPr anchor="ctr" marL="73152" marR="73152">
                     <a:lnL w="9525" cap="flat" cmpd="sng" algn="ctr">
                       <a:solidFill>
-                        <a:srgbClr val="F3CED7"/>
+                        <a:srgbClr val="F7D4DD"/>
                       </a:solidFill>
                       <a:prstDash val="solid"/>
                     </a:lnL>
                     <a:lnR w="9525" cap="flat" cmpd="sng" algn="ctr">
                       <a:solidFill>
-                        <a:srgbClr val="F3CED7"/>
+                        <a:srgbClr val="F7D4DD"/>
                       </a:solidFill>
                       <a:prstDash val="solid"/>
                     </a:lnR>
                     <a:lnT w="9525" cap="flat" cmpd="sng" algn="ctr">
                       <a:solidFill>
-                        <a:srgbClr val="F3CED7"/>
+                        <a:srgbClr val="F7D4DD"/>
                       </a:solidFill>
                       <a:prstDash val="solid"/>
                     </a:lnT>
                     <a:lnB w="9525" cap="flat" cmpd="sng" algn="ctr">
                       <a:solidFill>
-                        <a:srgbClr val="F3CED7"/>
+                        <a:srgbClr val="F7D4DD"/>
                       </a:solidFill>
                       <a:prstDash val="solid"/>
                     </a:lnB>
                     <a:solidFill>
-                      <a:srgbClr val="FAEFF2"/>
+                      <a:srgbClr val="FCF3F5"/>
                     </a:solidFill>
                   </a:tcPr>
                 </a:tc>
@@ -5705,30 +5705,30 @@
                   <a:tcPr anchor="ctr" marL="73152" marR="73152">
                     <a:lnL w="9525" cap="flat" cmpd="sng" algn="ctr">
                       <a:solidFill>
-                        <a:srgbClr val="F3CED7"/>
+                        <a:srgbClr val="F7D4DD"/>
                       </a:solidFill>
                       <a:prstDash val="solid"/>
                     </a:lnL>
                     <a:lnR w="9525" cap="flat" cmpd="sng" algn="ctr">
                       <a:solidFill>
-                        <a:srgbClr val="F3CED7"/>
+                        <a:srgbClr val="F7D4DD"/>
                       </a:solidFill>
                       <a:prstDash val="solid"/>
                     </a:lnR>
                     <a:lnT w="9525" cap="flat" cmpd="sng" algn="ctr">
                       <a:solidFill>
-                        <a:srgbClr val="F3CED7"/>
+                        <a:srgbClr val="F7D4DD"/>
                       </a:solidFill>
                       <a:prstDash val="solid"/>
                     </a:lnT>
                     <a:lnB w="9525" cap="flat" cmpd="sng" algn="ctr">
                       <a:solidFill>
-                        <a:srgbClr val="F3CED7"/>
+                        <a:srgbClr val="F7D4DD"/>
                       </a:solidFill>
                       <a:prstDash val="solid"/>
                     </a:lnB>
                     <a:solidFill>
-                      <a:srgbClr val="FAEFF2"/>
+                      <a:srgbClr val="FCF3F5"/>
                     </a:solidFill>
                   </a:tcPr>
                 </a:tc>
@@ -5751,30 +5751,30 @@
                   <a:tcPr anchor="ctr" marL="73152" marR="73152">
                     <a:lnL w="9525" cap="flat" cmpd="sng" algn="ctr">
                       <a:solidFill>
-                        <a:srgbClr val="F3CED7"/>
+                        <a:srgbClr val="F7D4DD"/>
                       </a:solidFill>
                       <a:prstDash val="solid"/>
                     </a:lnL>
                     <a:lnR w="9525" cap="flat" cmpd="sng" algn="ctr">
                       <a:solidFill>
-                        <a:srgbClr val="F3CED7"/>
+                        <a:srgbClr val="F7D4DD"/>
                       </a:solidFill>
                       <a:prstDash val="solid"/>
                     </a:lnR>
                     <a:lnT w="9525" cap="flat" cmpd="sng" algn="ctr">
                       <a:solidFill>
-                        <a:srgbClr val="F3CED7"/>
+                        <a:srgbClr val="F7D4DD"/>
                       </a:solidFill>
                       <a:prstDash val="solid"/>
                     </a:lnT>
                     <a:lnB w="9525" cap="flat" cmpd="sng" algn="ctr">
                       <a:solidFill>
-                        <a:srgbClr val="F3CED7"/>
+                        <a:srgbClr val="F7D4DD"/>
                       </a:solidFill>
                       <a:prstDash val="solid"/>
                     </a:lnB>
                     <a:solidFill>
-                      <a:srgbClr val="FAEFF2"/>
+                      <a:srgbClr val="FCF3F5"/>
                     </a:solidFill>
                   </a:tcPr>
                 </a:tc>
@@ -5799,25 +5799,25 @@
                   <a:tcPr anchor="ctr" marL="73152" marR="73152">
                     <a:lnL w="9525" cap="flat" cmpd="sng" algn="ctr">
                       <a:solidFill>
-                        <a:srgbClr val="F3CED7"/>
+                        <a:srgbClr val="F7D4DD"/>
                       </a:solidFill>
                       <a:prstDash val="solid"/>
                     </a:lnL>
                     <a:lnR w="9525" cap="flat" cmpd="sng" algn="ctr">
                       <a:solidFill>
-                        <a:srgbClr val="F3CED7"/>
+                        <a:srgbClr val="F7D4DD"/>
                       </a:solidFill>
                       <a:prstDash val="solid"/>
                     </a:lnR>
                     <a:lnT w="9525" cap="flat" cmpd="sng" algn="ctr">
                       <a:solidFill>
-                        <a:srgbClr val="F3CED7"/>
+                        <a:srgbClr val="F7D4DD"/>
                       </a:solidFill>
                       <a:prstDash val="solid"/>
                     </a:lnT>
                     <a:lnB w="9525" cap="flat" cmpd="sng" algn="ctr">
                       <a:solidFill>
-                        <a:srgbClr val="F3CED7"/>
+                        <a:srgbClr val="F7D4DD"/>
                       </a:solidFill>
                       <a:prstDash val="solid"/>
                     </a:lnB>
@@ -5845,25 +5845,25 @@
                   <a:tcPr anchor="ctr" marL="73152" marR="73152">
                     <a:lnL w="9525" cap="flat" cmpd="sng" algn="ctr">
                       <a:solidFill>
-                        <a:srgbClr val="F3CED7"/>
+                        <a:srgbClr val="F7D4DD"/>
                       </a:solidFill>
                       <a:prstDash val="solid"/>
                     </a:lnL>
                     <a:lnR w="9525" cap="flat" cmpd="sng" algn="ctr">
                       <a:solidFill>
-                        <a:srgbClr val="F3CED7"/>
+                        <a:srgbClr val="F7D4DD"/>
                       </a:solidFill>
                       <a:prstDash val="solid"/>
                     </a:lnR>
                     <a:lnT w="9525" cap="flat" cmpd="sng" algn="ctr">
                       <a:solidFill>
-                        <a:srgbClr val="F3CED7"/>
+                        <a:srgbClr val="F7D4DD"/>
                       </a:solidFill>
                       <a:prstDash val="solid"/>
                     </a:lnT>
                     <a:lnB w="9525" cap="flat" cmpd="sng" algn="ctr">
                       <a:solidFill>
-                        <a:srgbClr val="F3CED7"/>
+                        <a:srgbClr val="F7D4DD"/>
                       </a:solidFill>
                       <a:prstDash val="solid"/>
                     </a:lnB>
@@ -5891,25 +5891,25 @@
                   <a:tcPr anchor="ctr" marL="73152" marR="73152">
                     <a:lnL w="9525" cap="flat" cmpd="sng" algn="ctr">
                       <a:solidFill>
-                        <a:srgbClr val="F3CED7"/>
+                        <a:srgbClr val="F7D4DD"/>
                       </a:solidFill>
                       <a:prstDash val="solid"/>
                     </a:lnL>
                     <a:lnR w="9525" cap="flat" cmpd="sng" algn="ctr">
                       <a:solidFill>
-                        <a:srgbClr val="F3CED7"/>
+                        <a:srgbClr val="F7D4DD"/>
                       </a:solidFill>
                       <a:prstDash val="solid"/>
                     </a:lnR>
                     <a:lnT w="9525" cap="flat" cmpd="sng" algn="ctr">
                       <a:solidFill>
-                        <a:srgbClr val="F3CED7"/>
+                        <a:srgbClr val="F7D4DD"/>
                       </a:solidFill>
                       <a:prstDash val="solid"/>
                     </a:lnT>
                     <a:lnB w="9525" cap="flat" cmpd="sng" algn="ctr">
                       <a:solidFill>
-                        <a:srgbClr val="F3CED7"/>
+                        <a:srgbClr val="F7D4DD"/>
                       </a:solidFill>
                       <a:prstDash val="solid"/>
                     </a:lnB>
@@ -5937,25 +5937,25 @@
                   <a:tcPr anchor="ctr" marL="73152" marR="73152">
                     <a:lnL w="9525" cap="flat" cmpd="sng" algn="ctr">
                       <a:solidFill>
-                        <a:srgbClr val="F3CED7"/>
+                        <a:srgbClr val="F7D4DD"/>
                       </a:solidFill>
                       <a:prstDash val="solid"/>
                     </a:lnL>
                     <a:lnR w="9525" cap="flat" cmpd="sng" algn="ctr">
                       <a:solidFill>
-                        <a:srgbClr val="F3CED7"/>
+                        <a:srgbClr val="F7D4DD"/>
                       </a:solidFill>
                       <a:prstDash val="solid"/>
                     </a:lnR>
                     <a:lnT w="9525" cap="flat" cmpd="sng" algn="ctr">
                       <a:solidFill>
-                        <a:srgbClr val="F3CED7"/>
+                        <a:srgbClr val="F7D4DD"/>
                       </a:solidFill>
                       <a:prstDash val="solid"/>
                     </a:lnT>
                     <a:lnB w="9525" cap="flat" cmpd="sng" algn="ctr">
                       <a:solidFill>
-                        <a:srgbClr val="F3CED7"/>
+                        <a:srgbClr val="F7D4DD"/>
                       </a:solidFill>
                       <a:prstDash val="solid"/>
                     </a:lnB>
@@ -5983,25 +5983,25 @@
                   <a:tcPr anchor="ctr" marL="73152" marR="73152">
                     <a:lnL w="9525" cap="flat" cmpd="sng" algn="ctr">
                       <a:solidFill>
-                        <a:srgbClr val="F3CED7"/>
+                        <a:srgbClr val="F7D4DD"/>
                       </a:solidFill>
                       <a:prstDash val="solid"/>
                     </a:lnL>
                     <a:lnR w="9525" cap="flat" cmpd="sng" algn="ctr">
                       <a:solidFill>
-                        <a:srgbClr val="F3CED7"/>
+                        <a:srgbClr val="F7D4DD"/>
                       </a:solidFill>
                       <a:prstDash val="solid"/>
                     </a:lnR>
                     <a:lnT w="9525" cap="flat" cmpd="sng" algn="ctr">
                       <a:solidFill>
-                        <a:srgbClr val="F3CED7"/>
+                        <a:srgbClr val="F7D4DD"/>
                       </a:solidFill>
                       <a:prstDash val="solid"/>
                     </a:lnT>
                     <a:lnB w="9525" cap="flat" cmpd="sng" algn="ctr">
                       <a:solidFill>
-                        <a:srgbClr val="F3CED7"/>
+                        <a:srgbClr val="F7D4DD"/>
                       </a:solidFill>
                       <a:prstDash val="solid"/>
                     </a:lnB>
@@ -6031,30 +6031,30 @@
                   <a:tcPr anchor="ctr" marL="73152" marR="73152">
                     <a:lnL w="9525" cap="flat" cmpd="sng" algn="ctr">
                       <a:solidFill>
-                        <a:srgbClr val="F3CED7"/>
+                        <a:srgbClr val="F7D4DD"/>
                       </a:solidFill>
                       <a:prstDash val="solid"/>
                     </a:lnL>
                     <a:lnR w="9525" cap="flat" cmpd="sng" algn="ctr">
                       <a:solidFill>
-                        <a:srgbClr val="F3CED7"/>
+                        <a:srgbClr val="F7D4DD"/>
                       </a:solidFill>
                       <a:prstDash val="solid"/>
                     </a:lnR>
                     <a:lnT w="9525" cap="flat" cmpd="sng" algn="ctr">
                       <a:solidFill>
-                        <a:srgbClr val="F3CED7"/>
+                        <a:srgbClr val="F7D4DD"/>
                       </a:solidFill>
                       <a:prstDash val="solid"/>
                     </a:lnT>
                     <a:lnB w="9525" cap="flat" cmpd="sng" algn="ctr">
                       <a:solidFill>
-                        <a:srgbClr val="F3CED7"/>
+                        <a:srgbClr val="F7D4DD"/>
                       </a:solidFill>
                       <a:prstDash val="solid"/>
                     </a:lnB>
                     <a:solidFill>
-                      <a:srgbClr val="FAEFF2"/>
+                      <a:srgbClr val="FCF3F5"/>
                     </a:solidFill>
                   </a:tcPr>
                 </a:tc>
@@ -6077,30 +6077,30 @@
                   <a:tcPr anchor="ctr" marL="73152" marR="73152">
                     <a:lnL w="9525" cap="flat" cmpd="sng" algn="ctr">
                       <a:solidFill>
-                        <a:srgbClr val="F3CED7"/>
+                        <a:srgbClr val="F7D4DD"/>
                       </a:solidFill>
                       <a:prstDash val="solid"/>
                     </a:lnL>
                     <a:lnR w="9525" cap="flat" cmpd="sng" algn="ctr">
                       <a:solidFill>
-                        <a:srgbClr val="F3CED7"/>
+                        <a:srgbClr val="F7D4DD"/>
                       </a:solidFill>
                       <a:prstDash val="solid"/>
                     </a:lnR>
                     <a:lnT w="9525" cap="flat" cmpd="sng" algn="ctr">
                       <a:solidFill>
-                        <a:srgbClr val="F3CED7"/>
+                        <a:srgbClr val="F7D4DD"/>
                       </a:solidFill>
                       <a:prstDash val="solid"/>
                     </a:lnT>
                     <a:lnB w="9525" cap="flat" cmpd="sng" algn="ctr">
                       <a:solidFill>
-                        <a:srgbClr val="F3CED7"/>
+                        <a:srgbClr val="F7D4DD"/>
                       </a:solidFill>
                       <a:prstDash val="solid"/>
                     </a:lnB>
                     <a:solidFill>
-                      <a:srgbClr val="FAEFF2"/>
+                      <a:srgbClr val="FCF3F5"/>
                     </a:solidFill>
                   </a:tcPr>
                 </a:tc>
@@ -6123,30 +6123,30 @@
                   <a:tcPr anchor="ctr" marL="73152" marR="73152">
                     <a:lnL w="9525" cap="flat" cmpd="sng" algn="ctr">
                       <a:solidFill>
-                        <a:srgbClr val="F3CED7"/>
+                        <a:srgbClr val="F7D4DD"/>
                       </a:solidFill>
                       <a:prstDash val="solid"/>
                     </a:lnL>
                     <a:lnR w="9525" cap="flat" cmpd="sng" algn="ctr">
                       <a:solidFill>
-                        <a:srgbClr val="F3CED7"/>
+                        <a:srgbClr val="F7D4DD"/>
                       </a:solidFill>
                       <a:prstDash val="solid"/>
                     </a:lnR>
                     <a:lnT w="9525" cap="flat" cmpd="sng" algn="ctr">
                       <a:solidFill>
-                        <a:srgbClr val="F3CED7"/>
+                        <a:srgbClr val="F7D4DD"/>
                       </a:solidFill>
                       <a:prstDash val="solid"/>
                     </a:lnT>
                     <a:lnB w="9525" cap="flat" cmpd="sng" algn="ctr">
                       <a:solidFill>
-                        <a:srgbClr val="F3CED7"/>
+                        <a:srgbClr val="F7D4DD"/>
                       </a:solidFill>
                       <a:prstDash val="solid"/>
                     </a:lnB>
                     <a:solidFill>
-                      <a:srgbClr val="FAEFF2"/>
+                      <a:srgbClr val="FCF3F5"/>
                     </a:solidFill>
                   </a:tcPr>
                 </a:tc>
@@ -6169,30 +6169,30 @@
                   <a:tcPr anchor="ctr" marL="73152" marR="73152">
                     <a:lnL w="9525" cap="flat" cmpd="sng" algn="ctr">
                       <a:solidFill>
-                        <a:srgbClr val="F3CED7"/>
+                        <a:srgbClr val="F7D4DD"/>
                       </a:solidFill>
                       <a:prstDash val="solid"/>
                     </a:lnL>
                     <a:lnR w="9525" cap="flat" cmpd="sng" algn="ctr">
                       <a:solidFill>
-                        <a:srgbClr val="F3CED7"/>
+                        <a:srgbClr val="F7D4DD"/>
                       </a:solidFill>
                       <a:prstDash val="solid"/>
                     </a:lnR>
                     <a:lnT w="9525" cap="flat" cmpd="sng" algn="ctr">
                       <a:solidFill>
-                        <a:srgbClr val="F3CED7"/>
+                        <a:srgbClr val="F7D4DD"/>
                       </a:solidFill>
                       <a:prstDash val="solid"/>
                     </a:lnT>
                     <a:lnB w="9525" cap="flat" cmpd="sng" algn="ctr">
                       <a:solidFill>
-                        <a:srgbClr val="F3CED7"/>
+                        <a:srgbClr val="F7D4DD"/>
                       </a:solidFill>
                       <a:prstDash val="solid"/>
                     </a:lnB>
                     <a:solidFill>
-                      <a:srgbClr val="FAEFF2"/>
+                      <a:srgbClr val="FCF3F5"/>
                     </a:solidFill>
                   </a:tcPr>
                 </a:tc>
@@ -6215,30 +6215,30 @@
                   <a:tcPr anchor="ctr" marL="73152" marR="73152">
                     <a:lnL w="9525" cap="flat" cmpd="sng" algn="ctr">
                       <a:solidFill>
-                        <a:srgbClr val="F3CED7"/>
+                        <a:srgbClr val="F7D4DD"/>
                       </a:solidFill>
                       <a:prstDash val="solid"/>
                     </a:lnL>
                     <a:lnR w="9525" cap="flat" cmpd="sng" algn="ctr">
                       <a:solidFill>
-                        <a:srgbClr val="F3CED7"/>
+                        <a:srgbClr val="F7D4DD"/>
                       </a:solidFill>
                       <a:prstDash val="solid"/>
                     </a:lnR>
                     <a:lnT w="9525" cap="flat" cmpd="sng" algn="ctr">
                       <a:solidFill>
-                        <a:srgbClr val="F3CED7"/>
+                        <a:srgbClr val="F7D4DD"/>
                       </a:solidFill>
                       <a:prstDash val="solid"/>
                     </a:lnT>
                     <a:lnB w="9525" cap="flat" cmpd="sng" algn="ctr">
                       <a:solidFill>
-                        <a:srgbClr val="F3CED7"/>
+                        <a:srgbClr val="F7D4DD"/>
                       </a:solidFill>
                       <a:prstDash val="solid"/>
                     </a:lnB>
                     <a:solidFill>
-                      <a:srgbClr val="FAEFF2"/>
+                      <a:srgbClr val="FCF3F5"/>
                     </a:solidFill>
                   </a:tcPr>
                 </a:tc>
@@ -6261,7 +6261,7 @@
     <p:bg>
       <p:bgPr>
         <a:solidFill>
-          <a:srgbClr val="D1617D"/>
+          <a:srgbClr val="DB3D65"/>
         </a:solidFill>
         <a:effectLst/>
       </p:bgPr>
@@ -6334,7 +6334,7 @@
             <a:r>
               <a:rPr sz="3000" b="1" i="0">
                 <a:solidFill>
-                  <a:srgbClr val="9E2E4A"/>
+                  <a:srgbClr val="721D32"/>
                 </a:solidFill>
               </a:rPr>
               <a:t>보장 항목 체크</a:t>
@@ -6386,30 +6386,30 @@
                   <a:tcPr anchor="ctr" marL="73152" marR="73152">
                     <a:lnL w="9525" cap="flat" cmpd="sng" algn="ctr">
                       <a:solidFill>
-                        <a:srgbClr val="D1617D"/>
+                        <a:srgbClr val="DB3D65"/>
                       </a:solidFill>
                       <a:prstDash val="solid"/>
                     </a:lnL>
                     <a:lnR w="9525" cap="flat" cmpd="sng" algn="ctr">
                       <a:solidFill>
-                        <a:srgbClr val="D1617D"/>
+                        <a:srgbClr val="DB3D65"/>
                       </a:solidFill>
                       <a:prstDash val="solid"/>
                     </a:lnR>
                     <a:lnT w="9525" cap="flat" cmpd="sng" algn="ctr">
                       <a:solidFill>
-                        <a:srgbClr val="D1617D"/>
+                        <a:srgbClr val="DB3D65"/>
                       </a:solidFill>
                       <a:prstDash val="solid"/>
                     </a:lnT>
                     <a:lnB w="9525" cap="flat" cmpd="sng" algn="ctr">
                       <a:solidFill>
-                        <a:srgbClr val="D1617D"/>
+                        <a:srgbClr val="DB3D65"/>
                       </a:solidFill>
                       <a:prstDash val="solid"/>
                     </a:lnB>
                     <a:solidFill>
-                      <a:srgbClr val="D1617D"/>
+                      <a:srgbClr val="DB3D65"/>
                     </a:solidFill>
                   </a:tcPr>
                 </a:tc>
@@ -6432,30 +6432,30 @@
                   <a:tcPr anchor="ctr" marL="73152" marR="73152">
                     <a:lnL w="9525" cap="flat" cmpd="sng" algn="ctr">
                       <a:solidFill>
-                        <a:srgbClr val="D1617D"/>
+                        <a:srgbClr val="DB3D65"/>
                       </a:solidFill>
                       <a:prstDash val="solid"/>
                     </a:lnL>
                     <a:lnR w="9525" cap="flat" cmpd="sng" algn="ctr">
                       <a:solidFill>
-                        <a:srgbClr val="D1617D"/>
+                        <a:srgbClr val="DB3D65"/>
                       </a:solidFill>
                       <a:prstDash val="solid"/>
                     </a:lnR>
                     <a:lnT w="9525" cap="flat" cmpd="sng" algn="ctr">
                       <a:solidFill>
-                        <a:srgbClr val="D1617D"/>
+                        <a:srgbClr val="DB3D65"/>
                       </a:solidFill>
                       <a:prstDash val="solid"/>
                     </a:lnT>
                     <a:lnB w="9525" cap="flat" cmpd="sng" algn="ctr">
                       <a:solidFill>
-                        <a:srgbClr val="D1617D"/>
+                        <a:srgbClr val="DB3D65"/>
                       </a:solidFill>
                       <a:prstDash val="solid"/>
                     </a:lnB>
                     <a:solidFill>
-                      <a:srgbClr val="D1617D"/>
+                      <a:srgbClr val="DB3D65"/>
                     </a:solidFill>
                   </a:tcPr>
                 </a:tc>
@@ -6478,30 +6478,30 @@
                   <a:tcPr anchor="ctr" marL="73152" marR="73152">
                     <a:lnL w="9525" cap="flat" cmpd="sng" algn="ctr">
                       <a:solidFill>
-                        <a:srgbClr val="D1617D"/>
+                        <a:srgbClr val="DB3D65"/>
                       </a:solidFill>
                       <a:prstDash val="solid"/>
                     </a:lnL>
                     <a:lnR w="9525" cap="flat" cmpd="sng" algn="ctr">
                       <a:solidFill>
-                        <a:srgbClr val="D1617D"/>
+                        <a:srgbClr val="DB3D65"/>
                       </a:solidFill>
                       <a:prstDash val="solid"/>
                     </a:lnR>
                     <a:lnT w="9525" cap="flat" cmpd="sng" algn="ctr">
                       <a:solidFill>
-                        <a:srgbClr val="D1617D"/>
+                        <a:srgbClr val="DB3D65"/>
                       </a:solidFill>
                       <a:prstDash val="solid"/>
                     </a:lnT>
                     <a:lnB w="9525" cap="flat" cmpd="sng" algn="ctr">
                       <a:solidFill>
-                        <a:srgbClr val="D1617D"/>
+                        <a:srgbClr val="DB3D65"/>
                       </a:solidFill>
                       <a:prstDash val="solid"/>
                     </a:lnB>
                     <a:solidFill>
-                      <a:srgbClr val="D1617D"/>
+                      <a:srgbClr val="DB3D65"/>
                     </a:solidFill>
                   </a:tcPr>
                 </a:tc>
@@ -6524,30 +6524,30 @@
                   <a:tcPr anchor="ctr" marL="73152" marR="73152">
                     <a:lnL w="9525" cap="flat" cmpd="sng" algn="ctr">
                       <a:solidFill>
-                        <a:srgbClr val="D1617D"/>
+                        <a:srgbClr val="DB3D65"/>
                       </a:solidFill>
                       <a:prstDash val="solid"/>
                     </a:lnL>
                     <a:lnR w="9525" cap="flat" cmpd="sng" algn="ctr">
                       <a:solidFill>
-                        <a:srgbClr val="D1617D"/>
+                        <a:srgbClr val="DB3D65"/>
                       </a:solidFill>
                       <a:prstDash val="solid"/>
                     </a:lnR>
                     <a:lnT w="9525" cap="flat" cmpd="sng" algn="ctr">
                       <a:solidFill>
-                        <a:srgbClr val="D1617D"/>
+                        <a:srgbClr val="DB3D65"/>
                       </a:solidFill>
                       <a:prstDash val="solid"/>
                     </a:lnT>
                     <a:lnB w="9525" cap="flat" cmpd="sng" algn="ctr">
                       <a:solidFill>
-                        <a:srgbClr val="D1617D"/>
+                        <a:srgbClr val="DB3D65"/>
                       </a:solidFill>
                       <a:prstDash val="solid"/>
                     </a:lnB>
                     <a:solidFill>
-                      <a:srgbClr val="D1617D"/>
+                      <a:srgbClr val="DB3D65"/>
                     </a:solidFill>
                   </a:tcPr>
                 </a:tc>
@@ -6562,7 +6562,7 @@
                       <a:r>
                         <a:rPr sz="1400" b="1">
                           <a:solidFill>
-                            <a:srgbClr val="9E2E4A"/>
+                            <a:srgbClr val="721D32"/>
                           </a:solidFill>
                         </a:rPr>
                         <a:t>사망·재해</a:t>
@@ -6572,30 +6572,30 @@
                   <a:tcPr anchor="ctr" marL="73152" marR="73152">
                     <a:lnL w="9525" cap="flat" cmpd="sng" algn="ctr">
                       <a:solidFill>
-                        <a:srgbClr val="F3CED7"/>
+                        <a:srgbClr val="F7D4DD"/>
                       </a:solidFill>
                       <a:prstDash val="solid"/>
                     </a:lnL>
                     <a:lnR w="9525" cap="flat" cmpd="sng" algn="ctr">
                       <a:solidFill>
-                        <a:srgbClr val="F3CED7"/>
+                        <a:srgbClr val="F7D4DD"/>
                       </a:solidFill>
                       <a:prstDash val="solid"/>
                     </a:lnR>
                     <a:lnT w="9525" cap="flat" cmpd="sng" algn="ctr">
                       <a:solidFill>
-                        <a:srgbClr val="F3CED7"/>
+                        <a:srgbClr val="F7D4DD"/>
                       </a:solidFill>
                       <a:prstDash val="solid"/>
                     </a:lnT>
                     <a:lnB w="9525" cap="flat" cmpd="sng" algn="ctr">
                       <a:solidFill>
-                        <a:srgbClr val="F3CED7"/>
+                        <a:srgbClr val="F7D4DD"/>
                       </a:solidFill>
                       <a:prstDash val="solid"/>
                     </a:lnB>
                     <a:solidFill>
-                      <a:srgbClr val="F3CED7"/>
+                      <a:srgbClr val="F7D4DD"/>
                     </a:solidFill>
                   </a:tcPr>
                 </a:tc>
@@ -6618,25 +6618,25 @@
                   <a:tcPr anchor="ctr" marL="73152" marR="73152">
                     <a:lnL w="9525" cap="flat" cmpd="sng" algn="ctr">
                       <a:solidFill>
-                        <a:srgbClr val="F3CED7"/>
+                        <a:srgbClr val="F7D4DD"/>
                       </a:solidFill>
                       <a:prstDash val="solid"/>
                     </a:lnL>
                     <a:lnR w="9525" cap="flat" cmpd="sng" algn="ctr">
                       <a:solidFill>
-                        <a:srgbClr val="F3CED7"/>
+                        <a:srgbClr val="F7D4DD"/>
                       </a:solidFill>
                       <a:prstDash val="solid"/>
                     </a:lnR>
                     <a:lnT w="9525" cap="flat" cmpd="sng" algn="ctr">
                       <a:solidFill>
-                        <a:srgbClr val="F3CED7"/>
+                        <a:srgbClr val="F7D4DD"/>
                       </a:solidFill>
                       <a:prstDash val="solid"/>
                     </a:lnT>
                     <a:lnB w="9525" cap="flat" cmpd="sng" algn="ctr">
                       <a:solidFill>
-                        <a:srgbClr val="F3CED7"/>
+                        <a:srgbClr val="F7D4DD"/>
                       </a:solidFill>
                       <a:prstDash val="solid"/>
                     </a:lnB>
@@ -6664,25 +6664,25 @@
                   <a:tcPr anchor="ctr" marL="73152" marR="73152">
                     <a:lnL w="9525" cap="flat" cmpd="sng" algn="ctr">
                       <a:solidFill>
-                        <a:srgbClr val="F3CED7"/>
+                        <a:srgbClr val="F7D4DD"/>
                       </a:solidFill>
                       <a:prstDash val="solid"/>
                     </a:lnL>
                     <a:lnR w="9525" cap="flat" cmpd="sng" algn="ctr">
                       <a:solidFill>
-                        <a:srgbClr val="F3CED7"/>
+                        <a:srgbClr val="F7D4DD"/>
                       </a:solidFill>
                       <a:prstDash val="solid"/>
                     </a:lnR>
                     <a:lnT w="9525" cap="flat" cmpd="sng" algn="ctr">
                       <a:solidFill>
-                        <a:srgbClr val="F3CED7"/>
+                        <a:srgbClr val="F7D4DD"/>
                       </a:solidFill>
                       <a:prstDash val="solid"/>
                     </a:lnT>
                     <a:lnB w="9525" cap="flat" cmpd="sng" algn="ctr">
                       <a:solidFill>
-                        <a:srgbClr val="F3CED7"/>
+                        <a:srgbClr val="F7D4DD"/>
                       </a:solidFill>
                       <a:prstDash val="solid"/>
                     </a:lnB>
@@ -6710,25 +6710,25 @@
                   <a:tcPr anchor="ctr" marL="73152" marR="73152">
                     <a:lnL w="9525" cap="flat" cmpd="sng" algn="ctr">
                       <a:solidFill>
-                        <a:srgbClr val="F3CED7"/>
+                        <a:srgbClr val="F7D4DD"/>
                       </a:solidFill>
                       <a:prstDash val="solid"/>
                     </a:lnL>
                     <a:lnR w="9525" cap="flat" cmpd="sng" algn="ctr">
                       <a:solidFill>
-                        <a:srgbClr val="F3CED7"/>
+                        <a:srgbClr val="F7D4DD"/>
                       </a:solidFill>
                       <a:prstDash val="solid"/>
                     </a:lnR>
                     <a:lnT w="9525" cap="flat" cmpd="sng" algn="ctr">
                       <a:solidFill>
-                        <a:srgbClr val="F3CED7"/>
+                        <a:srgbClr val="F7D4DD"/>
                       </a:solidFill>
                       <a:prstDash val="solid"/>
                     </a:lnT>
                     <a:lnB w="9525" cap="flat" cmpd="sng" algn="ctr">
                       <a:solidFill>
-                        <a:srgbClr val="F3CED7"/>
+                        <a:srgbClr val="F7D4DD"/>
                       </a:solidFill>
                       <a:prstDash val="solid"/>
                     </a:lnB>
@@ -6748,7 +6748,7 @@
                       <a:r>
                         <a:rPr sz="1400" b="1">
                           <a:solidFill>
-                            <a:srgbClr val="9E2E4A"/>
+                            <a:srgbClr val="721D32"/>
                           </a:solidFill>
                         </a:rPr>
                         <a:t>질병 진단</a:t>
@@ -6758,30 +6758,30 @@
                   <a:tcPr anchor="ctr" marL="73152" marR="73152">
                     <a:lnL w="9525" cap="flat" cmpd="sng" algn="ctr">
                       <a:solidFill>
-                        <a:srgbClr val="F3CED7"/>
+                        <a:srgbClr val="F7D4DD"/>
                       </a:solidFill>
                       <a:prstDash val="solid"/>
                     </a:lnL>
                     <a:lnR w="9525" cap="flat" cmpd="sng" algn="ctr">
                       <a:solidFill>
-                        <a:srgbClr val="F3CED7"/>
+                        <a:srgbClr val="F7D4DD"/>
                       </a:solidFill>
                       <a:prstDash val="solid"/>
                     </a:lnR>
                     <a:lnT w="9525" cap="flat" cmpd="sng" algn="ctr">
                       <a:solidFill>
-                        <a:srgbClr val="F3CED7"/>
+                        <a:srgbClr val="F7D4DD"/>
                       </a:solidFill>
                       <a:prstDash val="solid"/>
                     </a:lnT>
                     <a:lnB w="9525" cap="flat" cmpd="sng" algn="ctr">
                       <a:solidFill>
-                        <a:srgbClr val="F3CED7"/>
+                        <a:srgbClr val="F7D4DD"/>
                       </a:solidFill>
                       <a:prstDash val="solid"/>
                     </a:lnB>
                     <a:solidFill>
-                      <a:srgbClr val="F3CED7"/>
+                      <a:srgbClr val="F7D4DD"/>
                     </a:solidFill>
                   </a:tcPr>
                 </a:tc>
@@ -6804,30 +6804,30 @@
                   <a:tcPr anchor="ctr" marL="73152" marR="73152">
                     <a:lnL w="9525" cap="flat" cmpd="sng" algn="ctr">
                       <a:solidFill>
-                        <a:srgbClr val="F3CED7"/>
+                        <a:srgbClr val="F7D4DD"/>
                       </a:solidFill>
                       <a:prstDash val="solid"/>
                     </a:lnL>
                     <a:lnR w="9525" cap="flat" cmpd="sng" algn="ctr">
                       <a:solidFill>
-                        <a:srgbClr val="F3CED7"/>
+                        <a:srgbClr val="F7D4DD"/>
                       </a:solidFill>
                       <a:prstDash val="solid"/>
                     </a:lnR>
                     <a:lnT w="9525" cap="flat" cmpd="sng" algn="ctr">
                       <a:solidFill>
-                        <a:srgbClr val="F3CED7"/>
+                        <a:srgbClr val="F7D4DD"/>
                       </a:solidFill>
                       <a:prstDash val="solid"/>
                     </a:lnT>
                     <a:lnB w="9525" cap="flat" cmpd="sng" algn="ctr">
                       <a:solidFill>
-                        <a:srgbClr val="F3CED7"/>
+                        <a:srgbClr val="F7D4DD"/>
                       </a:solidFill>
                       <a:prstDash val="solid"/>
                     </a:lnB>
                     <a:solidFill>
-                      <a:srgbClr val="FAEFF2"/>
+                      <a:srgbClr val="FCF3F5"/>
                     </a:solidFill>
                   </a:tcPr>
                 </a:tc>
@@ -6850,30 +6850,30 @@
                   <a:tcPr anchor="ctr" marL="73152" marR="73152">
                     <a:lnL w="9525" cap="flat" cmpd="sng" algn="ctr">
                       <a:solidFill>
-                        <a:srgbClr val="F3CED7"/>
+                        <a:srgbClr val="F7D4DD"/>
                       </a:solidFill>
                       <a:prstDash val="solid"/>
                     </a:lnL>
                     <a:lnR w="9525" cap="flat" cmpd="sng" algn="ctr">
                       <a:solidFill>
-                        <a:srgbClr val="F3CED7"/>
+                        <a:srgbClr val="F7D4DD"/>
                       </a:solidFill>
                       <a:prstDash val="solid"/>
                     </a:lnR>
                     <a:lnT w="9525" cap="flat" cmpd="sng" algn="ctr">
                       <a:solidFill>
-                        <a:srgbClr val="F3CED7"/>
+                        <a:srgbClr val="F7D4DD"/>
                       </a:solidFill>
                       <a:prstDash val="solid"/>
                     </a:lnT>
                     <a:lnB w="9525" cap="flat" cmpd="sng" algn="ctr">
                       <a:solidFill>
-                        <a:srgbClr val="F3CED7"/>
+                        <a:srgbClr val="F7D4DD"/>
                       </a:solidFill>
                       <a:prstDash val="solid"/>
                     </a:lnB>
                     <a:solidFill>
-                      <a:srgbClr val="FAEFF2"/>
+                      <a:srgbClr val="FCF3F5"/>
                     </a:solidFill>
                   </a:tcPr>
                 </a:tc>
@@ -6896,30 +6896,30 @@
                   <a:tcPr anchor="ctr" marL="73152" marR="73152">
                     <a:lnL w="9525" cap="flat" cmpd="sng" algn="ctr">
                       <a:solidFill>
-                        <a:srgbClr val="F3CED7"/>
+                        <a:srgbClr val="F7D4DD"/>
                       </a:solidFill>
                       <a:prstDash val="solid"/>
                     </a:lnL>
                     <a:lnR w="9525" cap="flat" cmpd="sng" algn="ctr">
                       <a:solidFill>
-                        <a:srgbClr val="F3CED7"/>
+                        <a:srgbClr val="F7D4DD"/>
                       </a:solidFill>
                       <a:prstDash val="solid"/>
                     </a:lnR>
                     <a:lnT w="9525" cap="flat" cmpd="sng" algn="ctr">
                       <a:solidFill>
-                        <a:srgbClr val="F3CED7"/>
+                        <a:srgbClr val="F7D4DD"/>
                       </a:solidFill>
                       <a:prstDash val="solid"/>
                     </a:lnT>
                     <a:lnB w="9525" cap="flat" cmpd="sng" algn="ctr">
                       <a:solidFill>
-                        <a:srgbClr val="F3CED7"/>
+                        <a:srgbClr val="F7D4DD"/>
                       </a:solidFill>
                       <a:prstDash val="solid"/>
                     </a:lnB>
                     <a:solidFill>
-                      <a:srgbClr val="FAEFF2"/>
+                      <a:srgbClr val="FCF3F5"/>
                     </a:solidFill>
                   </a:tcPr>
                 </a:tc>
@@ -6934,7 +6934,7 @@
                       <a:r>
                         <a:rPr sz="1400" b="1">
                           <a:solidFill>
-                            <a:srgbClr val="9E2E4A"/>
+                            <a:srgbClr val="721D32"/>
                           </a:solidFill>
                         </a:rPr>
                         <a:t>암</a:t>
@@ -6944,30 +6944,30 @@
                   <a:tcPr anchor="ctr" marL="73152" marR="73152">
                     <a:lnL w="9525" cap="flat" cmpd="sng" algn="ctr">
                       <a:solidFill>
-                        <a:srgbClr val="F3CED7"/>
+                        <a:srgbClr val="F7D4DD"/>
                       </a:solidFill>
                       <a:prstDash val="solid"/>
                     </a:lnL>
                     <a:lnR w="9525" cap="flat" cmpd="sng" algn="ctr">
                       <a:solidFill>
-                        <a:srgbClr val="F3CED7"/>
+                        <a:srgbClr val="F7D4DD"/>
                       </a:solidFill>
                       <a:prstDash val="solid"/>
                     </a:lnR>
                     <a:lnT w="9525" cap="flat" cmpd="sng" algn="ctr">
                       <a:solidFill>
-                        <a:srgbClr val="F3CED7"/>
+                        <a:srgbClr val="F7D4DD"/>
                       </a:solidFill>
                       <a:prstDash val="solid"/>
                     </a:lnT>
                     <a:lnB w="9525" cap="flat" cmpd="sng" algn="ctr">
                       <a:solidFill>
-                        <a:srgbClr val="F3CED7"/>
+                        <a:srgbClr val="F7D4DD"/>
                       </a:solidFill>
                       <a:prstDash val="solid"/>
                     </a:lnB>
                     <a:solidFill>
-                      <a:srgbClr val="F3CED7"/>
+                      <a:srgbClr val="F7D4DD"/>
                     </a:solidFill>
                   </a:tcPr>
                 </a:tc>
@@ -6990,25 +6990,25 @@
                   <a:tcPr anchor="ctr" marL="73152" marR="73152">
                     <a:lnL w="9525" cap="flat" cmpd="sng" algn="ctr">
                       <a:solidFill>
-                        <a:srgbClr val="F3CED7"/>
+                        <a:srgbClr val="F7D4DD"/>
                       </a:solidFill>
                       <a:prstDash val="solid"/>
                     </a:lnL>
                     <a:lnR w="9525" cap="flat" cmpd="sng" algn="ctr">
                       <a:solidFill>
-                        <a:srgbClr val="F3CED7"/>
+                        <a:srgbClr val="F7D4DD"/>
                       </a:solidFill>
                       <a:prstDash val="solid"/>
                     </a:lnR>
                     <a:lnT w="9525" cap="flat" cmpd="sng" algn="ctr">
                       <a:solidFill>
-                        <a:srgbClr val="F3CED7"/>
+                        <a:srgbClr val="F7D4DD"/>
                       </a:solidFill>
                       <a:prstDash val="solid"/>
                     </a:lnT>
                     <a:lnB w="9525" cap="flat" cmpd="sng" algn="ctr">
                       <a:solidFill>
-                        <a:srgbClr val="F3CED7"/>
+                        <a:srgbClr val="F7D4DD"/>
                       </a:solidFill>
                       <a:prstDash val="solid"/>
                     </a:lnB>
@@ -7036,25 +7036,25 @@
                   <a:tcPr anchor="ctr" marL="73152" marR="73152">
                     <a:lnL w="9525" cap="flat" cmpd="sng" algn="ctr">
                       <a:solidFill>
-                        <a:srgbClr val="F3CED7"/>
+                        <a:srgbClr val="F7D4DD"/>
                       </a:solidFill>
                       <a:prstDash val="solid"/>
                     </a:lnL>
                     <a:lnR w="9525" cap="flat" cmpd="sng" algn="ctr">
                       <a:solidFill>
-                        <a:srgbClr val="F3CED7"/>
+                        <a:srgbClr val="F7D4DD"/>
                       </a:solidFill>
                       <a:prstDash val="solid"/>
                     </a:lnR>
                     <a:lnT w="9525" cap="flat" cmpd="sng" algn="ctr">
                       <a:solidFill>
-                        <a:srgbClr val="F3CED7"/>
+                        <a:srgbClr val="F7D4DD"/>
                       </a:solidFill>
                       <a:prstDash val="solid"/>
                     </a:lnT>
                     <a:lnB w="9525" cap="flat" cmpd="sng" algn="ctr">
                       <a:solidFill>
-                        <a:srgbClr val="F3CED7"/>
+                        <a:srgbClr val="F7D4DD"/>
                       </a:solidFill>
                       <a:prstDash val="solid"/>
                     </a:lnB>
@@ -7082,25 +7082,25 @@
                   <a:tcPr anchor="ctr" marL="73152" marR="73152">
                     <a:lnL w="9525" cap="flat" cmpd="sng" algn="ctr">
                       <a:solidFill>
-                        <a:srgbClr val="F3CED7"/>
+                        <a:srgbClr val="F7D4DD"/>
                       </a:solidFill>
                       <a:prstDash val="solid"/>
                     </a:lnL>
                     <a:lnR w="9525" cap="flat" cmpd="sng" algn="ctr">
                       <a:solidFill>
-                        <a:srgbClr val="F3CED7"/>
+                        <a:srgbClr val="F7D4DD"/>
                       </a:solidFill>
                       <a:prstDash val="solid"/>
                     </a:lnR>
                     <a:lnT w="9525" cap="flat" cmpd="sng" algn="ctr">
                       <a:solidFill>
-                        <a:srgbClr val="F3CED7"/>
+                        <a:srgbClr val="F7D4DD"/>
                       </a:solidFill>
                       <a:prstDash val="solid"/>
                     </a:lnT>
                     <a:lnB w="9525" cap="flat" cmpd="sng" algn="ctr">
                       <a:solidFill>
-                        <a:srgbClr val="F3CED7"/>
+                        <a:srgbClr val="F7D4DD"/>
                       </a:solidFill>
                       <a:prstDash val="solid"/>
                     </a:lnB>
@@ -7120,7 +7120,7 @@
                       <a:r>
                         <a:rPr sz="1400" b="1">
                           <a:solidFill>
-                            <a:srgbClr val="9E2E4A"/>
+                            <a:srgbClr val="721D32"/>
                           </a:solidFill>
                         </a:rPr>
                         <a:t>뇌·심장</a:t>
@@ -7130,30 +7130,30 @@
                   <a:tcPr anchor="ctr" marL="73152" marR="73152">
                     <a:lnL w="9525" cap="flat" cmpd="sng" algn="ctr">
                       <a:solidFill>
-                        <a:srgbClr val="F3CED7"/>
+                        <a:srgbClr val="F7D4DD"/>
                       </a:solidFill>
                       <a:prstDash val="solid"/>
                     </a:lnL>
                     <a:lnR w="9525" cap="flat" cmpd="sng" algn="ctr">
                       <a:solidFill>
-                        <a:srgbClr val="F3CED7"/>
+                        <a:srgbClr val="F7D4DD"/>
                       </a:solidFill>
                       <a:prstDash val="solid"/>
                     </a:lnR>
                     <a:lnT w="9525" cap="flat" cmpd="sng" algn="ctr">
                       <a:solidFill>
-                        <a:srgbClr val="F3CED7"/>
+                        <a:srgbClr val="F7D4DD"/>
                       </a:solidFill>
                       <a:prstDash val="solid"/>
                     </a:lnT>
                     <a:lnB w="9525" cap="flat" cmpd="sng" algn="ctr">
                       <a:solidFill>
-                        <a:srgbClr val="F3CED7"/>
+                        <a:srgbClr val="F7D4DD"/>
                       </a:solidFill>
                       <a:prstDash val="solid"/>
                     </a:lnB>
                     <a:solidFill>
-                      <a:srgbClr val="F3CED7"/>
+                      <a:srgbClr val="F7D4DD"/>
                     </a:solidFill>
                   </a:tcPr>
                 </a:tc>
@@ -7176,30 +7176,30 @@
                   <a:tcPr anchor="ctr" marL="73152" marR="73152">
                     <a:lnL w="9525" cap="flat" cmpd="sng" algn="ctr">
                       <a:solidFill>
-                        <a:srgbClr val="F3CED7"/>
+                        <a:srgbClr val="F7D4DD"/>
                       </a:solidFill>
                       <a:prstDash val="solid"/>
                     </a:lnL>
                     <a:lnR w="9525" cap="flat" cmpd="sng" algn="ctr">
                       <a:solidFill>
-                        <a:srgbClr val="F3CED7"/>
+                        <a:srgbClr val="F7D4DD"/>
                       </a:solidFill>
                       <a:prstDash val="solid"/>
                     </a:lnR>
                     <a:lnT w="9525" cap="flat" cmpd="sng" algn="ctr">
                       <a:solidFill>
-                        <a:srgbClr val="F3CED7"/>
+                        <a:srgbClr val="F7D4DD"/>
                       </a:solidFill>
                       <a:prstDash val="solid"/>
                     </a:lnT>
                     <a:lnB w="9525" cap="flat" cmpd="sng" algn="ctr">
                       <a:solidFill>
-                        <a:srgbClr val="F3CED7"/>
+                        <a:srgbClr val="F7D4DD"/>
                       </a:solidFill>
                       <a:prstDash val="solid"/>
                     </a:lnB>
                     <a:solidFill>
-                      <a:srgbClr val="FAEFF2"/>
+                      <a:srgbClr val="FCF3F5"/>
                     </a:solidFill>
                   </a:tcPr>
                 </a:tc>
@@ -7222,30 +7222,30 @@
                   <a:tcPr anchor="ctr" marL="73152" marR="73152">
                     <a:lnL w="9525" cap="flat" cmpd="sng" algn="ctr">
                       <a:solidFill>
-                        <a:srgbClr val="F3CED7"/>
+                        <a:srgbClr val="F7D4DD"/>
                       </a:solidFill>
                       <a:prstDash val="solid"/>
                     </a:lnL>
                     <a:lnR w="9525" cap="flat" cmpd="sng" algn="ctr">
                       <a:solidFill>
-                        <a:srgbClr val="F3CED7"/>
+                        <a:srgbClr val="F7D4DD"/>
                       </a:solidFill>
                       <a:prstDash val="solid"/>
                     </a:lnR>
                     <a:lnT w="9525" cap="flat" cmpd="sng" algn="ctr">
                       <a:solidFill>
-                        <a:srgbClr val="F3CED7"/>
+                        <a:srgbClr val="F7D4DD"/>
                       </a:solidFill>
                       <a:prstDash val="solid"/>
                     </a:lnT>
                     <a:lnB w="9525" cap="flat" cmpd="sng" algn="ctr">
                       <a:solidFill>
-                        <a:srgbClr val="F3CED7"/>
+                        <a:srgbClr val="F7D4DD"/>
                       </a:solidFill>
                       <a:prstDash val="solid"/>
                     </a:lnB>
                     <a:solidFill>
-                      <a:srgbClr val="FAEFF2"/>
+                      <a:srgbClr val="FCF3F5"/>
                     </a:solidFill>
                   </a:tcPr>
                 </a:tc>
@@ -7268,30 +7268,30 @@
                   <a:tcPr anchor="ctr" marL="73152" marR="73152">
                     <a:lnL w="9525" cap="flat" cmpd="sng" algn="ctr">
                       <a:solidFill>
-                        <a:srgbClr val="F3CED7"/>
+                        <a:srgbClr val="F7D4DD"/>
                       </a:solidFill>
                       <a:prstDash val="solid"/>
                     </a:lnL>
                     <a:lnR w="9525" cap="flat" cmpd="sng" algn="ctr">
                       <a:solidFill>
-                        <a:srgbClr val="F3CED7"/>
+                        <a:srgbClr val="F7D4DD"/>
                       </a:solidFill>
                       <a:prstDash val="solid"/>
                     </a:lnR>
                     <a:lnT w="9525" cap="flat" cmpd="sng" algn="ctr">
                       <a:solidFill>
-                        <a:srgbClr val="F3CED7"/>
+                        <a:srgbClr val="F7D4DD"/>
                       </a:solidFill>
                       <a:prstDash val="solid"/>
                     </a:lnT>
                     <a:lnB w="9525" cap="flat" cmpd="sng" algn="ctr">
                       <a:solidFill>
-                        <a:srgbClr val="F3CED7"/>
+                        <a:srgbClr val="F7D4DD"/>
                       </a:solidFill>
                       <a:prstDash val="solid"/>
                     </a:lnB>
                     <a:solidFill>
-                      <a:srgbClr val="FAEFF2"/>
+                      <a:srgbClr val="FCF3F5"/>
                     </a:solidFill>
                   </a:tcPr>
                 </a:tc>
@@ -7306,7 +7306,7 @@
                       <a:r>
                         <a:rPr sz="1400" b="1">
                           <a:solidFill>
-                            <a:srgbClr val="9E2E4A"/>
+                            <a:srgbClr val="721D32"/>
                           </a:solidFill>
                         </a:rPr>
                         <a:t>입원·수술</a:t>
@@ -7316,30 +7316,30 @@
                   <a:tcPr anchor="ctr" marL="73152" marR="73152">
                     <a:lnL w="9525" cap="flat" cmpd="sng" algn="ctr">
                       <a:solidFill>
-                        <a:srgbClr val="F3CED7"/>
+                        <a:srgbClr val="F7D4DD"/>
                       </a:solidFill>
                       <a:prstDash val="solid"/>
                     </a:lnL>
                     <a:lnR w="9525" cap="flat" cmpd="sng" algn="ctr">
                       <a:solidFill>
-                        <a:srgbClr val="F3CED7"/>
+                        <a:srgbClr val="F7D4DD"/>
                       </a:solidFill>
                       <a:prstDash val="solid"/>
                     </a:lnR>
                     <a:lnT w="9525" cap="flat" cmpd="sng" algn="ctr">
                       <a:solidFill>
-                        <a:srgbClr val="F3CED7"/>
+                        <a:srgbClr val="F7D4DD"/>
                       </a:solidFill>
                       <a:prstDash val="solid"/>
                     </a:lnT>
                     <a:lnB w="9525" cap="flat" cmpd="sng" algn="ctr">
                       <a:solidFill>
-                        <a:srgbClr val="F3CED7"/>
+                        <a:srgbClr val="F7D4DD"/>
                       </a:solidFill>
                       <a:prstDash val="solid"/>
                     </a:lnB>
                     <a:solidFill>
-                      <a:srgbClr val="F3CED7"/>
+                      <a:srgbClr val="F7D4DD"/>
                     </a:solidFill>
                   </a:tcPr>
                 </a:tc>
@@ -7362,25 +7362,25 @@
                   <a:tcPr anchor="ctr" marL="73152" marR="73152">
                     <a:lnL w="9525" cap="flat" cmpd="sng" algn="ctr">
                       <a:solidFill>
-                        <a:srgbClr val="F3CED7"/>
+                        <a:srgbClr val="F7D4DD"/>
                       </a:solidFill>
                       <a:prstDash val="solid"/>
                     </a:lnL>
                     <a:lnR w="9525" cap="flat" cmpd="sng" algn="ctr">
                       <a:solidFill>
-                        <a:srgbClr val="F3CED7"/>
+                        <a:srgbClr val="F7D4DD"/>
                       </a:solidFill>
                       <a:prstDash val="solid"/>
                     </a:lnR>
                     <a:lnT w="9525" cap="flat" cmpd="sng" algn="ctr">
                       <a:solidFill>
-                        <a:srgbClr val="F3CED7"/>
+                        <a:srgbClr val="F7D4DD"/>
                       </a:solidFill>
                       <a:prstDash val="solid"/>
                     </a:lnT>
                     <a:lnB w="9525" cap="flat" cmpd="sng" algn="ctr">
                       <a:solidFill>
-                        <a:srgbClr val="F3CED7"/>
+                        <a:srgbClr val="F7D4DD"/>
                       </a:solidFill>
                       <a:prstDash val="solid"/>
                     </a:lnB>
@@ -7408,25 +7408,25 @@
                   <a:tcPr anchor="ctr" marL="73152" marR="73152">
                     <a:lnL w="9525" cap="flat" cmpd="sng" algn="ctr">
                       <a:solidFill>
-                        <a:srgbClr val="F3CED7"/>
+                        <a:srgbClr val="F7D4DD"/>
                       </a:solidFill>
                       <a:prstDash val="solid"/>
                     </a:lnL>
                     <a:lnR w="9525" cap="flat" cmpd="sng" algn="ctr">
                       <a:solidFill>
-                        <a:srgbClr val="F3CED7"/>
+                        <a:srgbClr val="F7D4DD"/>
                       </a:solidFill>
                       <a:prstDash val="solid"/>
                     </a:lnR>
                     <a:lnT w="9525" cap="flat" cmpd="sng" algn="ctr">
                       <a:solidFill>
-                        <a:srgbClr val="F3CED7"/>
+                        <a:srgbClr val="F7D4DD"/>
                       </a:solidFill>
                       <a:prstDash val="solid"/>
                     </a:lnT>
                     <a:lnB w="9525" cap="flat" cmpd="sng" algn="ctr">
                       <a:solidFill>
-                        <a:srgbClr val="F3CED7"/>
+                        <a:srgbClr val="F7D4DD"/>
                       </a:solidFill>
                       <a:prstDash val="solid"/>
                     </a:lnB>
@@ -7454,25 +7454,25 @@
                   <a:tcPr anchor="ctr" marL="73152" marR="73152">
                     <a:lnL w="9525" cap="flat" cmpd="sng" algn="ctr">
                       <a:solidFill>
-                        <a:srgbClr val="F3CED7"/>
+                        <a:srgbClr val="F7D4DD"/>
                       </a:solidFill>
                       <a:prstDash val="solid"/>
                     </a:lnL>
                     <a:lnR w="9525" cap="flat" cmpd="sng" algn="ctr">
                       <a:solidFill>
-                        <a:srgbClr val="F3CED7"/>
+                        <a:srgbClr val="F7D4DD"/>
                       </a:solidFill>
                       <a:prstDash val="solid"/>
                     </a:lnR>
                     <a:lnT w="9525" cap="flat" cmpd="sng" algn="ctr">
                       <a:solidFill>
-                        <a:srgbClr val="F3CED7"/>
+                        <a:srgbClr val="F7D4DD"/>
                       </a:solidFill>
                       <a:prstDash val="solid"/>
                     </a:lnT>
                     <a:lnB w="9525" cap="flat" cmpd="sng" algn="ctr">
                       <a:solidFill>
-                        <a:srgbClr val="F3CED7"/>
+                        <a:srgbClr val="F7D4DD"/>
                       </a:solidFill>
                       <a:prstDash val="solid"/>
                     </a:lnB>
@@ -7492,7 +7492,7 @@
                       <a:r>
                         <a:rPr sz="1400" b="1">
                           <a:solidFill>
-                            <a:srgbClr val="9E2E4A"/>
+                            <a:srgbClr val="721D32"/>
                           </a:solidFill>
                         </a:rPr>
                         <a:t>상해</a:t>
@@ -7502,30 +7502,30 @@
                   <a:tcPr anchor="ctr" marL="73152" marR="73152">
                     <a:lnL w="9525" cap="flat" cmpd="sng" algn="ctr">
                       <a:solidFill>
-                        <a:srgbClr val="F3CED7"/>
+                        <a:srgbClr val="F7D4DD"/>
                       </a:solidFill>
                       <a:prstDash val="solid"/>
                     </a:lnL>
                     <a:lnR w="9525" cap="flat" cmpd="sng" algn="ctr">
                       <a:solidFill>
-                        <a:srgbClr val="F3CED7"/>
+                        <a:srgbClr val="F7D4DD"/>
                       </a:solidFill>
                       <a:prstDash val="solid"/>
                     </a:lnR>
                     <a:lnT w="9525" cap="flat" cmpd="sng" algn="ctr">
                       <a:solidFill>
-                        <a:srgbClr val="F3CED7"/>
+                        <a:srgbClr val="F7D4DD"/>
                       </a:solidFill>
                       <a:prstDash val="solid"/>
                     </a:lnT>
                     <a:lnB w="9525" cap="flat" cmpd="sng" algn="ctr">
                       <a:solidFill>
-                        <a:srgbClr val="F3CED7"/>
+                        <a:srgbClr val="F7D4DD"/>
                       </a:solidFill>
                       <a:prstDash val="solid"/>
                     </a:lnB>
                     <a:solidFill>
-                      <a:srgbClr val="F3CED7"/>
+                      <a:srgbClr val="F7D4DD"/>
                     </a:solidFill>
                   </a:tcPr>
                 </a:tc>
@@ -7548,30 +7548,30 @@
                   <a:tcPr anchor="ctr" marL="73152" marR="73152">
                     <a:lnL w="9525" cap="flat" cmpd="sng" algn="ctr">
                       <a:solidFill>
-                        <a:srgbClr val="F3CED7"/>
+                        <a:srgbClr val="F7D4DD"/>
                       </a:solidFill>
                       <a:prstDash val="solid"/>
                     </a:lnL>
                     <a:lnR w="9525" cap="flat" cmpd="sng" algn="ctr">
                       <a:solidFill>
-                        <a:srgbClr val="F3CED7"/>
+                        <a:srgbClr val="F7D4DD"/>
                       </a:solidFill>
                       <a:prstDash val="solid"/>
                     </a:lnR>
                     <a:lnT w="9525" cap="flat" cmpd="sng" algn="ctr">
                       <a:solidFill>
-                        <a:srgbClr val="F3CED7"/>
+                        <a:srgbClr val="F7D4DD"/>
                       </a:solidFill>
                       <a:prstDash val="solid"/>
                     </a:lnT>
                     <a:lnB w="9525" cap="flat" cmpd="sng" algn="ctr">
                       <a:solidFill>
-                        <a:srgbClr val="F3CED7"/>
+                        <a:srgbClr val="F7D4DD"/>
                       </a:solidFill>
                       <a:prstDash val="solid"/>
                     </a:lnB>
                     <a:solidFill>
-                      <a:srgbClr val="FAEFF2"/>
+                      <a:srgbClr val="FCF3F5"/>
                     </a:solidFill>
                   </a:tcPr>
                 </a:tc>
@@ -7594,30 +7594,30 @@
                   <a:tcPr anchor="ctr" marL="73152" marR="73152">
                     <a:lnL w="9525" cap="flat" cmpd="sng" algn="ctr">
                       <a:solidFill>
-                        <a:srgbClr val="F3CED7"/>
+                        <a:srgbClr val="F7D4DD"/>
                       </a:solidFill>
                       <a:prstDash val="solid"/>
                     </a:lnL>
                     <a:lnR w="9525" cap="flat" cmpd="sng" algn="ctr">
                       <a:solidFill>
-                        <a:srgbClr val="F3CED7"/>
+                        <a:srgbClr val="F7D4DD"/>
                       </a:solidFill>
                       <a:prstDash val="solid"/>
                     </a:lnR>
                     <a:lnT w="9525" cap="flat" cmpd="sng" algn="ctr">
                       <a:solidFill>
-                        <a:srgbClr val="F3CED7"/>
+                        <a:srgbClr val="F7D4DD"/>
                       </a:solidFill>
                       <a:prstDash val="solid"/>
                     </a:lnT>
                     <a:lnB w="9525" cap="flat" cmpd="sng" algn="ctr">
                       <a:solidFill>
-                        <a:srgbClr val="F3CED7"/>
+                        <a:srgbClr val="F7D4DD"/>
                       </a:solidFill>
                       <a:prstDash val="solid"/>
                     </a:lnB>
                     <a:solidFill>
-                      <a:srgbClr val="FAEFF2"/>
+                      <a:srgbClr val="FCF3F5"/>
                     </a:solidFill>
                   </a:tcPr>
                 </a:tc>
@@ -7640,30 +7640,30 @@
                   <a:tcPr anchor="ctr" marL="73152" marR="73152">
                     <a:lnL w="9525" cap="flat" cmpd="sng" algn="ctr">
                       <a:solidFill>
-                        <a:srgbClr val="F3CED7"/>
+                        <a:srgbClr val="F7D4DD"/>
                       </a:solidFill>
                       <a:prstDash val="solid"/>
                     </a:lnL>
                     <a:lnR w="9525" cap="flat" cmpd="sng" algn="ctr">
                       <a:solidFill>
-                        <a:srgbClr val="F3CED7"/>
+                        <a:srgbClr val="F7D4DD"/>
                       </a:solidFill>
                       <a:prstDash val="solid"/>
                     </a:lnR>
                     <a:lnT w="9525" cap="flat" cmpd="sng" algn="ctr">
                       <a:solidFill>
-                        <a:srgbClr val="F3CED7"/>
+                        <a:srgbClr val="F7D4DD"/>
                       </a:solidFill>
                       <a:prstDash val="solid"/>
                     </a:lnT>
                     <a:lnB w="9525" cap="flat" cmpd="sng" algn="ctr">
                       <a:solidFill>
-                        <a:srgbClr val="F3CED7"/>
+                        <a:srgbClr val="F7D4DD"/>
                       </a:solidFill>
                       <a:prstDash val="solid"/>
                     </a:lnB>
                     <a:solidFill>
-                      <a:srgbClr val="FAEFF2"/>
+                      <a:srgbClr val="FCF3F5"/>
                     </a:solidFill>
                   </a:tcPr>
                 </a:tc>
@@ -7678,7 +7678,7 @@
                       <a:r>
                         <a:rPr sz="1400" b="1">
                           <a:solidFill>
-                            <a:srgbClr val="9E2E4A"/>
+                            <a:srgbClr val="721D32"/>
                           </a:solidFill>
                         </a:rPr>
                         <a:t>실손의료</a:t>
@@ -7688,30 +7688,30 @@
                   <a:tcPr anchor="ctr" marL="73152" marR="73152">
                     <a:lnL w="9525" cap="flat" cmpd="sng" algn="ctr">
                       <a:solidFill>
-                        <a:srgbClr val="F3CED7"/>
+                        <a:srgbClr val="F7D4DD"/>
                       </a:solidFill>
                       <a:prstDash val="solid"/>
                     </a:lnL>
                     <a:lnR w="9525" cap="flat" cmpd="sng" algn="ctr">
                       <a:solidFill>
-                        <a:srgbClr val="F3CED7"/>
+                        <a:srgbClr val="F7D4DD"/>
                       </a:solidFill>
                       <a:prstDash val="solid"/>
                     </a:lnR>
                     <a:lnT w="9525" cap="flat" cmpd="sng" algn="ctr">
                       <a:solidFill>
-                        <a:srgbClr val="F3CED7"/>
+                        <a:srgbClr val="F7D4DD"/>
                       </a:solidFill>
                       <a:prstDash val="solid"/>
                     </a:lnT>
                     <a:lnB w="9525" cap="flat" cmpd="sng" algn="ctr">
                       <a:solidFill>
-                        <a:srgbClr val="F3CED7"/>
+                        <a:srgbClr val="F7D4DD"/>
                       </a:solidFill>
                       <a:prstDash val="solid"/>
                     </a:lnB>
                     <a:solidFill>
-                      <a:srgbClr val="F3CED7"/>
+                      <a:srgbClr val="F7D4DD"/>
                     </a:solidFill>
                   </a:tcPr>
                 </a:tc>
@@ -7734,25 +7734,25 @@
                   <a:tcPr anchor="ctr" marL="73152" marR="73152">
                     <a:lnL w="9525" cap="flat" cmpd="sng" algn="ctr">
                       <a:solidFill>
-                        <a:srgbClr val="F3CED7"/>
+                        <a:srgbClr val="F7D4DD"/>
                       </a:solidFill>
                       <a:prstDash val="solid"/>
                     </a:lnL>
                     <a:lnR w="9525" cap="flat" cmpd="sng" algn="ctr">
                       <a:solidFill>
-                        <a:srgbClr val="F3CED7"/>
+                        <a:srgbClr val="F7D4DD"/>
                       </a:solidFill>
                       <a:prstDash val="solid"/>
                     </a:lnR>
                     <a:lnT w="9525" cap="flat" cmpd="sng" algn="ctr">
                       <a:solidFill>
-                        <a:srgbClr val="F3CED7"/>
+                        <a:srgbClr val="F7D4DD"/>
                       </a:solidFill>
                       <a:prstDash val="solid"/>
                     </a:lnT>
                     <a:lnB w="9525" cap="flat" cmpd="sng" algn="ctr">
                       <a:solidFill>
-                        <a:srgbClr val="F3CED7"/>
+                        <a:srgbClr val="F7D4DD"/>
                       </a:solidFill>
                       <a:prstDash val="solid"/>
                     </a:lnB>
@@ -7780,25 +7780,25 @@
                   <a:tcPr anchor="ctr" marL="73152" marR="73152">
                     <a:lnL w="9525" cap="flat" cmpd="sng" algn="ctr">
                       <a:solidFill>
-                        <a:srgbClr val="F3CED7"/>
+                        <a:srgbClr val="F7D4DD"/>
                       </a:solidFill>
                       <a:prstDash val="solid"/>
                     </a:lnL>
                     <a:lnR w="9525" cap="flat" cmpd="sng" algn="ctr">
                       <a:solidFill>
-                        <a:srgbClr val="F3CED7"/>
+                        <a:srgbClr val="F7D4DD"/>
                       </a:solidFill>
                       <a:prstDash val="solid"/>
                     </a:lnR>
                     <a:lnT w="9525" cap="flat" cmpd="sng" algn="ctr">
                       <a:solidFill>
-                        <a:srgbClr val="F3CED7"/>
+                        <a:srgbClr val="F7D4DD"/>
                       </a:solidFill>
                       <a:prstDash val="solid"/>
                     </a:lnT>
                     <a:lnB w="9525" cap="flat" cmpd="sng" algn="ctr">
                       <a:solidFill>
-                        <a:srgbClr val="F3CED7"/>
+                        <a:srgbClr val="F7D4DD"/>
                       </a:solidFill>
                       <a:prstDash val="solid"/>
                     </a:lnB>
@@ -7826,25 +7826,25 @@
                   <a:tcPr anchor="ctr" marL="73152" marR="73152">
                     <a:lnL w="9525" cap="flat" cmpd="sng" algn="ctr">
                       <a:solidFill>
-                        <a:srgbClr val="F3CED7"/>
+                        <a:srgbClr val="F7D4DD"/>
                       </a:solidFill>
                       <a:prstDash val="solid"/>
                     </a:lnL>
                     <a:lnR w="9525" cap="flat" cmpd="sng" algn="ctr">
                       <a:solidFill>
-                        <a:srgbClr val="F3CED7"/>
+                        <a:srgbClr val="F7D4DD"/>
                       </a:solidFill>
                       <a:prstDash val="solid"/>
                     </a:lnR>
                     <a:lnT w="9525" cap="flat" cmpd="sng" algn="ctr">
                       <a:solidFill>
-                        <a:srgbClr val="F3CED7"/>
+                        <a:srgbClr val="F7D4DD"/>
                       </a:solidFill>
                       <a:prstDash val="solid"/>
                     </a:lnT>
                     <a:lnB w="9525" cap="flat" cmpd="sng" algn="ctr">
                       <a:solidFill>
-                        <a:srgbClr val="F3CED7"/>
+                        <a:srgbClr val="F7D4DD"/>
                       </a:solidFill>
                       <a:prstDash val="solid"/>
                     </a:lnB>
@@ -7864,7 +7864,7 @@
                       <a:r>
                         <a:rPr sz="1400" b="1">
                           <a:solidFill>
-                            <a:srgbClr val="9E2E4A"/>
+                            <a:srgbClr val="721D32"/>
                           </a:solidFill>
                         </a:rPr>
                         <a:t>연금·노후자금</a:t>
@@ -7874,30 +7874,30 @@
                   <a:tcPr anchor="ctr" marL="73152" marR="73152">
                     <a:lnL w="9525" cap="flat" cmpd="sng" algn="ctr">
                       <a:solidFill>
-                        <a:srgbClr val="F3CED7"/>
+                        <a:srgbClr val="F7D4DD"/>
                       </a:solidFill>
                       <a:prstDash val="solid"/>
                     </a:lnL>
                     <a:lnR w="9525" cap="flat" cmpd="sng" algn="ctr">
                       <a:solidFill>
-                        <a:srgbClr val="F3CED7"/>
+                        <a:srgbClr val="F7D4DD"/>
                       </a:solidFill>
                       <a:prstDash val="solid"/>
                     </a:lnR>
                     <a:lnT w="9525" cap="flat" cmpd="sng" algn="ctr">
                       <a:solidFill>
-                        <a:srgbClr val="F3CED7"/>
+                        <a:srgbClr val="F7D4DD"/>
                       </a:solidFill>
                       <a:prstDash val="solid"/>
                     </a:lnT>
                     <a:lnB w="9525" cap="flat" cmpd="sng" algn="ctr">
                       <a:solidFill>
-                        <a:srgbClr val="F3CED7"/>
+                        <a:srgbClr val="F7D4DD"/>
                       </a:solidFill>
                       <a:prstDash val="solid"/>
                     </a:lnB>
                     <a:solidFill>
-                      <a:srgbClr val="F3CED7"/>
+                      <a:srgbClr val="F7D4DD"/>
                     </a:solidFill>
                   </a:tcPr>
                 </a:tc>
@@ -7920,30 +7920,30 @@
                   <a:tcPr anchor="ctr" marL="73152" marR="73152">
                     <a:lnL w="9525" cap="flat" cmpd="sng" algn="ctr">
                       <a:solidFill>
-                        <a:srgbClr val="F3CED7"/>
+                        <a:srgbClr val="F7D4DD"/>
                       </a:solidFill>
                       <a:prstDash val="solid"/>
                     </a:lnL>
                     <a:lnR w="9525" cap="flat" cmpd="sng" algn="ctr">
                       <a:solidFill>
-                        <a:srgbClr val="F3CED7"/>
+                        <a:srgbClr val="F7D4DD"/>
                       </a:solidFill>
                       <a:prstDash val="solid"/>
                     </a:lnR>
                     <a:lnT w="9525" cap="flat" cmpd="sng" algn="ctr">
                       <a:solidFill>
-                        <a:srgbClr val="F3CED7"/>
+                        <a:srgbClr val="F7D4DD"/>
                       </a:solidFill>
                       <a:prstDash val="solid"/>
                     </a:lnT>
                     <a:lnB w="9525" cap="flat" cmpd="sng" algn="ctr">
                       <a:solidFill>
-                        <a:srgbClr val="F3CED7"/>
+                        <a:srgbClr val="F7D4DD"/>
                       </a:solidFill>
                       <a:prstDash val="solid"/>
                     </a:lnB>
                     <a:solidFill>
-                      <a:srgbClr val="FAEFF2"/>
+                      <a:srgbClr val="FCF3F5"/>
                     </a:solidFill>
                   </a:tcPr>
                 </a:tc>
@@ -7966,30 +7966,30 @@
                   <a:tcPr anchor="ctr" marL="73152" marR="73152">
                     <a:lnL w="9525" cap="flat" cmpd="sng" algn="ctr">
                       <a:solidFill>
-                        <a:srgbClr val="F3CED7"/>
+                        <a:srgbClr val="F7D4DD"/>
                       </a:solidFill>
                       <a:prstDash val="solid"/>
                     </a:lnL>
                     <a:lnR w="9525" cap="flat" cmpd="sng" algn="ctr">
                       <a:solidFill>
-                        <a:srgbClr val="F3CED7"/>
+                        <a:srgbClr val="F7D4DD"/>
                       </a:solidFill>
                       <a:prstDash val="solid"/>
                     </a:lnR>
                     <a:lnT w="9525" cap="flat" cmpd="sng" algn="ctr">
                       <a:solidFill>
-                        <a:srgbClr val="F3CED7"/>
+                        <a:srgbClr val="F7D4DD"/>
                       </a:solidFill>
                       <a:prstDash val="solid"/>
                     </a:lnT>
                     <a:lnB w="9525" cap="flat" cmpd="sng" algn="ctr">
                       <a:solidFill>
-                        <a:srgbClr val="F3CED7"/>
+                        <a:srgbClr val="F7D4DD"/>
                       </a:solidFill>
                       <a:prstDash val="solid"/>
                     </a:lnB>
                     <a:solidFill>
-                      <a:srgbClr val="FAEFF2"/>
+                      <a:srgbClr val="FCF3F5"/>
                     </a:solidFill>
                   </a:tcPr>
                 </a:tc>
@@ -8012,30 +8012,30 @@
                   <a:tcPr anchor="ctr" marL="73152" marR="73152">
                     <a:lnL w="9525" cap="flat" cmpd="sng" algn="ctr">
                       <a:solidFill>
-                        <a:srgbClr val="F3CED7"/>
+                        <a:srgbClr val="F7D4DD"/>
                       </a:solidFill>
                       <a:prstDash val="solid"/>
                     </a:lnL>
                     <a:lnR w="9525" cap="flat" cmpd="sng" algn="ctr">
                       <a:solidFill>
-                        <a:srgbClr val="F3CED7"/>
+                        <a:srgbClr val="F7D4DD"/>
                       </a:solidFill>
                       <a:prstDash val="solid"/>
                     </a:lnR>
                     <a:lnT w="9525" cap="flat" cmpd="sng" algn="ctr">
                       <a:solidFill>
-                        <a:srgbClr val="F3CED7"/>
+                        <a:srgbClr val="F7D4DD"/>
                       </a:solidFill>
                       <a:prstDash val="solid"/>
                     </a:lnT>
                     <a:lnB w="9525" cap="flat" cmpd="sng" algn="ctr">
                       <a:solidFill>
-                        <a:srgbClr val="F3CED7"/>
+                        <a:srgbClr val="F7D4DD"/>
                       </a:solidFill>
                       <a:prstDash val="solid"/>
                     </a:lnB>
                     <a:solidFill>
-                      <a:srgbClr val="FAEFF2"/>
+                      <a:srgbClr val="FCF3F5"/>
                     </a:solidFill>
                   </a:tcPr>
                 </a:tc>
@@ -8058,7 +8058,7 @@
     <p:bg>
       <p:bgPr>
         <a:solidFill>
-          <a:srgbClr val="D1617D"/>
+          <a:srgbClr val="DB3D65"/>
         </a:solidFill>
         <a:effectLst/>
       </p:bgPr>
@@ -8131,7 +8131,7 @@
             <a:r>
               <a:rPr sz="3000" b="1" i="0">
                 <a:solidFill>
-                  <a:srgbClr val="9E2E4A"/>
+                  <a:srgbClr val="721D32"/>
                 </a:solidFill>
               </a:rPr>
               <a:t>월 보험료 한눈에</a:t>
@@ -8156,11 +8156,11 @@
             </a:avLst>
           </a:prstGeom>
           <a:solidFill>
-            <a:srgbClr val="FAEFF2"/>
+            <a:srgbClr val="FCF3F5"/>
           </a:solidFill>
           <a:ln w="15875">
             <a:solidFill>
-              <a:srgbClr val="F3CED7"/>
+              <a:srgbClr val="F7D4DD"/>
             </a:solidFill>
           </a:ln>
         </p:spPr>
@@ -8187,7 +8187,7 @@
             <a:avLst/>
           </a:prstGeom>
           <a:solidFill>
-            <a:srgbClr val="D1617D"/>
+            <a:srgbClr val="DB3D65"/>
           </a:solidFill>
           <a:ln>
             <a:noFill/>
@@ -8245,7 +8245,7 @@
             <a:r>
               <a:rPr sz="1700" b="1" i="0">
                 <a:solidFill>
-                  <a:srgbClr val="9E2E4A"/>
+                  <a:srgbClr val="721D32"/>
                 </a:solidFill>
               </a:rPr>
               <a:t>월 보험료 합계</a:t>
@@ -8308,11 +8308,11 @@
             </a:avLst>
           </a:prstGeom>
           <a:solidFill>
-            <a:srgbClr val="FAEFF2"/>
+            <a:srgbClr val="FCF3F5"/>
           </a:solidFill>
           <a:ln w="15875">
             <a:solidFill>
-              <a:srgbClr val="F3CED7"/>
+              <a:srgbClr val="F7D4DD"/>
             </a:solidFill>
           </a:ln>
         </p:spPr>
@@ -8339,7 +8339,7 @@
             <a:avLst/>
           </a:prstGeom>
           <a:solidFill>
-            <a:srgbClr val="D1617D"/>
+            <a:srgbClr val="DB3D65"/>
           </a:solidFill>
           <a:ln>
             <a:noFill/>
@@ -8397,7 +8397,7 @@
             <a:r>
               <a:rPr sz="1700" b="1" i="0">
                 <a:solidFill>
-                  <a:srgbClr val="9E2E4A"/>
+                  <a:srgbClr val="721D32"/>
                 </a:solidFill>
               </a:rPr>
               <a:t>연 보험료 합계</a:t>
@@ -8460,11 +8460,11 @@
             </a:avLst>
           </a:prstGeom>
           <a:solidFill>
-            <a:srgbClr val="FAEFF2"/>
+            <a:srgbClr val="FCF3F5"/>
           </a:solidFill>
           <a:ln w="15875">
             <a:solidFill>
-              <a:srgbClr val="F3CED7"/>
+              <a:srgbClr val="F7D4DD"/>
             </a:solidFill>
           </a:ln>
         </p:spPr>
@@ -8491,7 +8491,7 @@
             <a:avLst/>
           </a:prstGeom>
           <a:solidFill>
-            <a:srgbClr val="D1617D"/>
+            <a:srgbClr val="DB3D65"/>
           </a:solidFill>
           <a:ln>
             <a:noFill/>
@@ -8549,7 +8549,7 @@
             <a:r>
               <a:rPr sz="1700" b="1" i="0">
                 <a:solidFill>
-                  <a:srgbClr val="9E2E4A"/>
+                  <a:srgbClr val="721D32"/>
                 </a:solidFill>
               </a:rPr>
               <a:t>월 소득 대비</a:t>
@@ -8647,7 +8647,7 @@
     <p:bg>
       <p:bgPr>
         <a:solidFill>
-          <a:srgbClr val="D1617D"/>
+          <a:srgbClr val="DB3D65"/>
         </a:solidFill>
         <a:effectLst/>
       </p:bgPr>
@@ -8720,7 +8720,7 @@
             <a:r>
               <a:rPr sz="3000" b="1" i="0">
                 <a:solidFill>
-                  <a:srgbClr val="9E2E4A"/>
+                  <a:srgbClr val="721D32"/>
                 </a:solidFill>
               </a:rPr>
               <a:t>점검 메모와 다음 할 일</a:t>
@@ -8745,11 +8745,11 @@
             </a:avLst>
           </a:prstGeom>
           <a:solidFill>
-            <a:srgbClr val="FAEFF2"/>
+            <a:srgbClr val="FCF3F5"/>
           </a:solidFill>
           <a:ln w="15875">
             <a:solidFill>
-              <a:srgbClr val="F3CED7"/>
+              <a:srgbClr val="F7D4DD"/>
             </a:solidFill>
           </a:ln>
         </p:spPr>
@@ -8776,7 +8776,7 @@
             <a:avLst/>
           </a:prstGeom>
           <a:solidFill>
-            <a:srgbClr val="D1617D"/>
+            <a:srgbClr val="DB3D65"/>
           </a:solidFill>
           <a:ln>
             <a:noFill/>
@@ -8834,7 +8834,7 @@
             <a:r>
               <a:rPr sz="1800" b="1" i="0">
                 <a:solidFill>
-                  <a:srgbClr val="9E2E4A"/>
+                  <a:srgbClr val="721D32"/>
                 </a:solidFill>
               </a:rPr>
               <a:t>확인할 것</a:t>
@@ -8897,11 +8897,11 @@
             </a:avLst>
           </a:prstGeom>
           <a:solidFill>
-            <a:srgbClr val="FAEFF2"/>
+            <a:srgbClr val="FCF3F5"/>
           </a:solidFill>
           <a:ln w="15875">
             <a:solidFill>
-              <a:srgbClr val="F3CED7"/>
+              <a:srgbClr val="F7D4DD"/>
             </a:solidFill>
           </a:ln>
         </p:spPr>
@@ -8928,7 +8928,7 @@
             <a:avLst/>
           </a:prstGeom>
           <a:solidFill>
-            <a:srgbClr val="D1617D"/>
+            <a:srgbClr val="DB3D65"/>
           </a:solidFill>
           <a:ln>
             <a:noFill/>
@@ -8986,7 +8986,7 @@
             <a:r>
               <a:rPr sz="1800" b="1" i="0">
                 <a:solidFill>
-                  <a:srgbClr val="9E2E4A"/>
+                  <a:srgbClr val="721D32"/>
                 </a:solidFill>
               </a:rPr>
               <a:t>문의할 것</a:t>
@@ -9049,11 +9049,11 @@
             </a:avLst>
           </a:prstGeom>
           <a:solidFill>
-            <a:srgbClr val="FAEFF2"/>
+            <a:srgbClr val="FCF3F5"/>
           </a:solidFill>
           <a:ln w="15875">
             <a:solidFill>
-              <a:srgbClr val="F3CED7"/>
+              <a:srgbClr val="F7D4DD"/>
             </a:solidFill>
           </a:ln>
         </p:spPr>
@@ -9080,7 +9080,7 @@
             <a:avLst/>
           </a:prstGeom>
           <a:solidFill>
-            <a:srgbClr val="D1617D"/>
+            <a:srgbClr val="DB3D65"/>
           </a:solidFill>
           <a:ln>
             <a:noFill/>
@@ -9138,7 +9138,7 @@
             <a:r>
               <a:rPr sz="1800" b="1" i="0">
                 <a:solidFill>
-                  <a:srgbClr val="9E2E4A"/>
+                  <a:srgbClr val="721D32"/>
                 </a:solidFill>
               </a:rPr>
               <a:t>정리할 날짜</a:t>
@@ -9241,34 +9241,34 @@
         <a:sysClr val="window" lastClr="FFFFFF"/>
       </a:lt1>
       <a:dk2>
-        <a:srgbClr val="9E2E4A"/>
+        <a:srgbClr val="721D32"/>
       </a:dk2>
       <a:lt2>
-        <a:srgbClr val="FAEFF2"/>
+        <a:srgbClr val="FCF3F5"/>
       </a:lt2>
       <a:accent1>
-        <a:srgbClr val="D1617D"/>
+        <a:srgbClr val="DB3D65"/>
       </a:accent1>
       <a:accent2>
-        <a:srgbClr val="3B9151"/>
+        <a:srgbClr val="339941"/>
       </a:accent2>
       <a:accent3>
-        <a:srgbClr val="9E2E4A"/>
+        <a:srgbClr val="721D32"/>
       </a:accent3>
       <a:accent4>
-        <a:srgbClr val="F3CED7"/>
+        <a:srgbClr val="F7D4DD"/>
       </a:accent4>
       <a:accent5>
-        <a:srgbClr val="867967"/>
+        <a:srgbClr val="876B53"/>
       </a:accent5>
       <a:accent6>
-        <a:srgbClr val="C58292"/>
+        <a:srgbClr val="AA7784"/>
       </a:accent6>
       <a:hlink>
-        <a:srgbClr val="D1617D"/>
+        <a:srgbClr val="DB3D65"/>
       </a:hlink>
       <a:folHlink>
-        <a:srgbClr val="9E2E4A"/>
+        <a:srgbClr val="721D32"/>
       </a:folHlink>
     </a:clrScheme>
     <a:fontScheme name="Office">
